--- a/public/lessons/year-6-maths/summer/week-30/apply-year-6-reasoning/teaching-powerpoint-v1.pptx
+++ b/public/lessons/year-6-maths/summer/week-30/apply-year-6-reasoning/teaching-powerpoint-v1.pptx
@@ -2,24 +2,24 @@
 <file path=ppt/presentation.xml><?xml version="1.0" encoding="utf-8"?>
 <p:presentation xmlns:p="http://schemas.openxmlformats.org/presentationml/2006/main">
   <p:sldMasterIdLst>
-    <p:sldMasterId xmlns:r="http://schemas.openxmlformats.org/officeDocument/2006/relationships" id="2147483648" r:id="R50aa0b091c5545f0"/>
+    <p:sldMasterId xmlns:r="http://schemas.openxmlformats.org/officeDocument/2006/relationships" id="2147483648" r:id="R00cb26e7e3884551"/>
   </p:sldMasterIdLst>
   <p:notesMasterIdLst>
-    <p:notesMasterId xmlns:r="http://schemas.openxmlformats.org/officeDocument/2006/relationships" r:id="Rb94dabf273bd44e0"/>
+    <p:notesMasterId xmlns:r="http://schemas.openxmlformats.org/officeDocument/2006/relationships" r:id="R3b04a05f33af4820"/>
   </p:notesMasterIdLst>
   <p:sldIdLst>
-    <p:sldId xmlns:r="http://schemas.openxmlformats.org/officeDocument/2006/relationships" id="256" r:id="Rf1e3df2739d9412e"/>
-    <p:sldId xmlns:r="http://schemas.openxmlformats.org/officeDocument/2006/relationships" id="257" r:id="Racd3db5655544ec3"/>
-    <p:sldId xmlns:r="http://schemas.openxmlformats.org/officeDocument/2006/relationships" id="258" r:id="R869c2cff32d94f2b"/>
-    <p:sldId xmlns:r="http://schemas.openxmlformats.org/officeDocument/2006/relationships" id="259" r:id="R19b322d6b35e4943"/>
-    <p:sldId xmlns:r="http://schemas.openxmlformats.org/officeDocument/2006/relationships" id="260" r:id="Rc64d3294171a4616"/>
-    <p:sldId xmlns:r="http://schemas.openxmlformats.org/officeDocument/2006/relationships" id="261" r:id="Rce2f58f533cf4813"/>
-    <p:sldId xmlns:r="http://schemas.openxmlformats.org/officeDocument/2006/relationships" id="262" r:id="Rc68bcd71e38f43b4"/>
-    <p:sldId xmlns:r="http://schemas.openxmlformats.org/officeDocument/2006/relationships" id="263" r:id="R99c4b42122114217"/>
-    <p:sldId xmlns:r="http://schemas.openxmlformats.org/officeDocument/2006/relationships" id="264" r:id="R427457cbec7e41ba"/>
-    <p:sldId xmlns:r="http://schemas.openxmlformats.org/officeDocument/2006/relationships" id="265" r:id="R2fe341b709234410"/>
-    <p:sldId xmlns:r="http://schemas.openxmlformats.org/officeDocument/2006/relationships" id="266" r:id="R213910c14ace42d1"/>
-    <p:sldId xmlns:r="http://schemas.openxmlformats.org/officeDocument/2006/relationships" id="267" r:id="R59cb90ec11bd4808"/>
+    <p:sldId xmlns:r="http://schemas.openxmlformats.org/officeDocument/2006/relationships" id="256" r:id="Re72a7c18ec6b41a8"/>
+    <p:sldId xmlns:r="http://schemas.openxmlformats.org/officeDocument/2006/relationships" id="257" r:id="Rdaaf125c9ec44636"/>
+    <p:sldId xmlns:r="http://schemas.openxmlformats.org/officeDocument/2006/relationships" id="258" r:id="Rbd807520b05f47d1"/>
+    <p:sldId xmlns:r="http://schemas.openxmlformats.org/officeDocument/2006/relationships" id="259" r:id="R01da8d01de5d4f94"/>
+    <p:sldId xmlns:r="http://schemas.openxmlformats.org/officeDocument/2006/relationships" id="260" r:id="Rf9d7982755e14662"/>
+    <p:sldId xmlns:r="http://schemas.openxmlformats.org/officeDocument/2006/relationships" id="261" r:id="R0d2367b62712486e"/>
+    <p:sldId xmlns:r="http://schemas.openxmlformats.org/officeDocument/2006/relationships" id="262" r:id="R9a4ddff51f4d4609"/>
+    <p:sldId xmlns:r="http://schemas.openxmlformats.org/officeDocument/2006/relationships" id="263" r:id="Rd252a5b2ed6347c9"/>
+    <p:sldId xmlns:r="http://schemas.openxmlformats.org/officeDocument/2006/relationships" id="264" r:id="R0763402b4ca04a59"/>
+    <p:sldId xmlns:r="http://schemas.openxmlformats.org/officeDocument/2006/relationships" id="265" r:id="R30577e5034f34fd6"/>
+    <p:sldId xmlns:r="http://schemas.openxmlformats.org/officeDocument/2006/relationships" id="266" r:id="R404db1bad6ca448d"/>
+    <p:sldId xmlns:r="http://schemas.openxmlformats.org/officeDocument/2006/relationships" id="267" r:id="R3720926913f4450d"/>
   </p:sldIdLst>
   <p:sldSz cx="12192000" cy="6858000"/>
   <p:notesSz cx="6858000" cy="9144000"/>
@@ -873,7 +873,7 @@
           <a:lstStyle xmlns:a="http://schemas.openxmlformats.org/drawingml/2006/main"/>
           <a:p xmlns:a="http://schemas.openxmlformats.org/drawingml/2006/main">
             <a:r>
-              <a:t>I do. Reveal the question, setup and each calculation stage one click at a time. Pupils watch before copying. Model answer: £560.</a:t>
+              <a:t>I do. Reveal the question, then reveal each mathematical change one click at a time. Point to the numbers and operation that changed before moving to the next line. Final answer: £560.</a:t>
             </a:r>
           </a:p>
         </p:txBody>
@@ -1291,7 +1291,7 @@
   </p:cSld>
   <p:clrMap bg1="lt1" tx1="dk1" bg2="lt2" tx2="dk2" accent1="accent1" accent2="accent2" accent3="accent3" accent4="accent4" accent5="accent5" accent6="accent6" hlink="hlink" folHlink="folHlink"/>
   <p:sldLayoutIdLst>
-    <p:sldLayoutId xmlns:r="http://schemas.openxmlformats.org/officeDocument/2006/relationships" id="2147483649" r:id="R3b4a365c05d848ff"/>
+    <p:sldLayoutId xmlns:r="http://schemas.openxmlformats.org/officeDocument/2006/relationships" id="2147483649" r:id="R109d53c46c29486c"/>
   </p:sldLayoutIdLst>
   <p:txStyles>
     <p:titleStyle>
@@ -1842,7 +1842,7 @@
           <p:cNvPr id="12" name="">
             <a:extLst xmlns:a="http://schemas.openxmlformats.org/drawingml/2006/main">
               <a:ext uri="{FF2B5EF4-FFF2-40B4-BE49-F238E27FC236}">
-                <a16:creationId xmlns:a16="http://schemas.microsoft.com/office/drawing/2014/main" id="{BE9BC07B-B58A-4FC3-9599-79FC30B3C5F5}"/>
+                <a16:creationId xmlns:a16="http://schemas.microsoft.com/office/drawing/2014/main" id="{FE9A5C5B-5BFD-4D62-B5AC-EF9F16F918C3}"/>
               </a:ext>
             </a:extLst>
           </p:cNvPr>
@@ -1874,7 +1874,7 @@
           <p:cNvPr id="2" name="">
             <a:extLst xmlns:a="http://schemas.openxmlformats.org/drawingml/2006/main">
               <a:ext uri="{FF2B5EF4-FFF2-40B4-BE49-F238E27FC236}">
-                <a16:creationId xmlns:a16="http://schemas.microsoft.com/office/drawing/2014/main" id="{0B101BB4-226A-4075-B9BE-18D7F58ABD91}"/>
+                <a16:creationId xmlns:a16="http://schemas.microsoft.com/office/drawing/2014/main" id="{4864AA5A-F0DA-4134-A995-1CB704FE9D79}"/>
               </a:ext>
             </a:extLst>
           </p:cNvPr>
@@ -1931,7 +1931,7 @@
           <p:cNvPr id="3" name="">
             <a:extLst xmlns:a="http://schemas.openxmlformats.org/drawingml/2006/main">
               <a:ext uri="{FF2B5EF4-FFF2-40B4-BE49-F238E27FC236}">
-                <a16:creationId xmlns:a16="http://schemas.microsoft.com/office/drawing/2014/main" id="{CD2E338C-B3EB-4F74-9C4E-4AEE13769232}"/>
+                <a16:creationId xmlns:a16="http://schemas.microsoft.com/office/drawing/2014/main" id="{DF3DBB1E-AB30-4712-B885-6E8F27694F96}"/>
               </a:ext>
             </a:extLst>
           </p:cNvPr>
@@ -1965,7 +1965,7 @@
           <p:cNvPr id="4" name="">
             <a:extLst xmlns:a="http://schemas.openxmlformats.org/drawingml/2006/main">
               <a:ext uri="{FF2B5EF4-FFF2-40B4-BE49-F238E27FC236}">
-                <a16:creationId xmlns:a16="http://schemas.microsoft.com/office/drawing/2014/main" id="{EFAA1ED7-9B07-4256-97F0-B677E0642617}"/>
+                <a16:creationId xmlns:a16="http://schemas.microsoft.com/office/drawing/2014/main" id="{5DC93645-2645-4C30-AB9F-E81C3C84788E}"/>
               </a:ext>
             </a:extLst>
           </p:cNvPr>
@@ -2022,7 +2022,7 @@
           <p:cNvPr id="5" name="">
             <a:extLst xmlns:a="http://schemas.openxmlformats.org/drawingml/2006/main">
               <a:ext uri="{FF2B5EF4-FFF2-40B4-BE49-F238E27FC236}">
-                <a16:creationId xmlns:a16="http://schemas.microsoft.com/office/drawing/2014/main" id="{7FEDFEAD-671C-4A04-8159-00FE8747A6EC}"/>
+                <a16:creationId xmlns:a16="http://schemas.microsoft.com/office/drawing/2014/main" id="{5E3CB2F6-09FD-4AF5-9944-25D84F8857FF}"/>
               </a:ext>
             </a:extLst>
           </p:cNvPr>
@@ -2079,7 +2079,7 @@
           <p:cNvPr id="6" name="">
             <a:extLst xmlns:a="http://schemas.openxmlformats.org/drawingml/2006/main">
               <a:ext uri="{FF2B5EF4-FFF2-40B4-BE49-F238E27FC236}">
-                <a16:creationId xmlns:a16="http://schemas.microsoft.com/office/drawing/2014/main" id="{D50FAC09-99B6-4F1B-A008-4FC4DA13CACD}"/>
+                <a16:creationId xmlns:a16="http://schemas.microsoft.com/office/drawing/2014/main" id="{C19CC7F0-02BF-4392-B9BF-34413258DD75}"/>
               </a:ext>
             </a:extLst>
           </p:cNvPr>
@@ -2113,7 +2113,7 @@
           <p:cNvPr id="7" name="">
             <a:extLst xmlns:a="http://schemas.openxmlformats.org/drawingml/2006/main">
               <a:ext uri="{FF2B5EF4-FFF2-40B4-BE49-F238E27FC236}">
-                <a16:creationId xmlns:a16="http://schemas.microsoft.com/office/drawing/2014/main" id="{8822ECE7-D640-4821-9F67-F12A58953485}"/>
+                <a16:creationId xmlns:a16="http://schemas.microsoft.com/office/drawing/2014/main" id="{C4F7EA5B-3BBC-479C-906B-E77FF66D9F60}"/>
               </a:ext>
             </a:extLst>
           </p:cNvPr>
@@ -2170,7 +2170,7 @@
           <p:cNvPr id="8" name="">
             <a:extLst xmlns:a="http://schemas.openxmlformats.org/drawingml/2006/main">
               <a:ext uri="{FF2B5EF4-FFF2-40B4-BE49-F238E27FC236}">
-                <a16:creationId xmlns:a16="http://schemas.microsoft.com/office/drawing/2014/main" id="{16139498-9C47-46F0-9734-2893F513A846}"/>
+                <a16:creationId xmlns:a16="http://schemas.microsoft.com/office/drawing/2014/main" id="{3ECACBF6-285D-423E-AE7E-AED5AEBA3013}"/>
               </a:ext>
             </a:extLst>
           </p:cNvPr>
@@ -2227,7 +2227,7 @@
           <p:cNvPr id="9" name="">
             <a:extLst xmlns:a="http://schemas.openxmlformats.org/drawingml/2006/main">
               <a:ext uri="{FF2B5EF4-FFF2-40B4-BE49-F238E27FC236}">
-                <a16:creationId xmlns:a16="http://schemas.microsoft.com/office/drawing/2014/main" id="{A008D3D4-C99C-4C93-88F8-68199F31763D}"/>
+                <a16:creationId xmlns:a16="http://schemas.microsoft.com/office/drawing/2014/main" id="{42ACF843-484B-418D-AE73-DEA4F36641B8}"/>
               </a:ext>
             </a:extLst>
           </p:cNvPr>
@@ -2284,7 +2284,7 @@
           <p:cNvPr id="10" name="">
             <a:extLst xmlns:a="http://schemas.openxmlformats.org/drawingml/2006/main">
               <a:ext uri="{FF2B5EF4-FFF2-40B4-BE49-F238E27FC236}">
-                <a16:creationId xmlns:a16="http://schemas.microsoft.com/office/drawing/2014/main" id="{2C3DE4A3-E596-4B51-8D73-985BDB5DBE78}"/>
+                <a16:creationId xmlns:a16="http://schemas.microsoft.com/office/drawing/2014/main" id="{57681174-43CE-4B84-AB27-7F87146A4929}"/>
               </a:ext>
             </a:extLst>
           </p:cNvPr>
@@ -2341,7 +2341,7 @@
           <p:cNvPr id="11" name="">
             <a:extLst xmlns:a="http://schemas.openxmlformats.org/drawingml/2006/main">
               <a:ext uri="{FF2B5EF4-FFF2-40B4-BE49-F238E27FC236}">
-                <a16:creationId xmlns:a16="http://schemas.microsoft.com/office/drawing/2014/main" id="{5C8261B9-DFF5-4DBC-B0CF-F64202D837C9}"/>
+                <a16:creationId xmlns:a16="http://schemas.microsoft.com/office/drawing/2014/main" id="{81479322-1D74-4E93-AB9D-D2120731B29C}"/>
               </a:ext>
             </a:extLst>
           </p:cNvPr>
@@ -2396,7 +2396,7 @@
     </p:spTree>
     <p:extLst>
       <p:ext uri="{BB962C8B-B14F-4D97-AF65-F5344CB8AC3E}">
-        <p14:creationId xmlns:p14="http://schemas.microsoft.com/office/powerpoint/2010/main" val="276548166"/>
+        <p14:creationId xmlns:p14="http://schemas.microsoft.com/office/powerpoint/2010/main" val="548964282"/>
       </p:ext>
     </p:extLst>
   </p:cSld>
@@ -2427,7 +2427,7 @@
           <p:cNvPr id="14" name="">
             <a:extLst xmlns:a="http://schemas.openxmlformats.org/drawingml/2006/main">
               <a:ext uri="{FF2B5EF4-FFF2-40B4-BE49-F238E27FC236}">
-                <a16:creationId xmlns:a16="http://schemas.microsoft.com/office/drawing/2014/main" id="{03B277AC-F478-4139-B644-D2E0C7BDFD2F}"/>
+                <a16:creationId xmlns:a16="http://schemas.microsoft.com/office/drawing/2014/main" id="{DEF28BEF-FF09-4734-9EDD-E4522988D019}"/>
               </a:ext>
             </a:extLst>
           </p:cNvPr>
@@ -2459,7 +2459,7 @@
           <p:cNvPr id="2" name="">
             <a:extLst xmlns:a="http://schemas.openxmlformats.org/drawingml/2006/main">
               <a:ext uri="{FF2B5EF4-FFF2-40B4-BE49-F238E27FC236}">
-                <a16:creationId xmlns:a16="http://schemas.microsoft.com/office/drawing/2014/main" id="{74A89744-B6B7-4CFA-861A-6BAF06BCCAFE}"/>
+                <a16:creationId xmlns:a16="http://schemas.microsoft.com/office/drawing/2014/main" id="{831B7E52-3783-42E4-BFE6-30CA6820EBC5}"/>
               </a:ext>
             </a:extLst>
           </p:cNvPr>
@@ -2516,7 +2516,7 @@
           <p:cNvPr id="3" name="">
             <a:extLst xmlns:a="http://schemas.openxmlformats.org/drawingml/2006/main">
               <a:ext uri="{FF2B5EF4-FFF2-40B4-BE49-F238E27FC236}">
-                <a16:creationId xmlns:a16="http://schemas.microsoft.com/office/drawing/2014/main" id="{41B29FDC-E85C-43F4-90AF-E4C7D035F8A8}"/>
+                <a16:creationId xmlns:a16="http://schemas.microsoft.com/office/drawing/2014/main" id="{6BDE7AC5-27B7-4F51-A9DD-269D5CBED6BA}"/>
               </a:ext>
             </a:extLst>
           </p:cNvPr>
@@ -2548,7 +2548,7 @@
           <p:cNvPr id="4" name="">
             <a:extLst xmlns:a="http://schemas.openxmlformats.org/drawingml/2006/main">
               <a:ext uri="{FF2B5EF4-FFF2-40B4-BE49-F238E27FC236}">
-                <a16:creationId xmlns:a16="http://schemas.microsoft.com/office/drawing/2014/main" id="{BE789F7B-11CD-439C-9104-2C9C985AA897}"/>
+                <a16:creationId xmlns:a16="http://schemas.microsoft.com/office/drawing/2014/main" id="{489CA8E3-5B6C-455C-BC82-B3EBF9B89FC7}"/>
               </a:ext>
             </a:extLst>
           </p:cNvPr>
@@ -2605,7 +2605,7 @@
           <p:cNvPr id="5" name="">
             <a:extLst xmlns:a="http://schemas.openxmlformats.org/drawingml/2006/main">
               <a:ext uri="{FF2B5EF4-FFF2-40B4-BE49-F238E27FC236}">
-                <a16:creationId xmlns:a16="http://schemas.microsoft.com/office/drawing/2014/main" id="{339B924A-FDCF-4339-BA36-C86807F082AA}"/>
+                <a16:creationId xmlns:a16="http://schemas.microsoft.com/office/drawing/2014/main" id="{A013605E-D983-4F19-A270-3604B7662D7A}"/>
               </a:ext>
             </a:extLst>
           </p:cNvPr>
@@ -2662,7 +2662,7 @@
           <p:cNvPr id="6" name="">
             <a:extLst xmlns:a="http://schemas.openxmlformats.org/drawingml/2006/main">
               <a:ext uri="{FF2B5EF4-FFF2-40B4-BE49-F238E27FC236}">
-                <a16:creationId xmlns:a16="http://schemas.microsoft.com/office/drawing/2014/main" id="{C4EC6FCE-BD6A-4AF6-9A66-95AA0FF2EB02}"/>
+                <a16:creationId xmlns:a16="http://schemas.microsoft.com/office/drawing/2014/main" id="{AD90F7C6-A239-4B28-B7DD-D41CED7F36AE}"/>
               </a:ext>
             </a:extLst>
           </p:cNvPr>
@@ -2719,7 +2719,7 @@
           <p:cNvPr id="7" name="">
             <a:extLst xmlns:a="http://schemas.openxmlformats.org/drawingml/2006/main">
               <a:ext uri="{FF2B5EF4-FFF2-40B4-BE49-F238E27FC236}">
-                <a16:creationId xmlns:a16="http://schemas.microsoft.com/office/drawing/2014/main" id="{CD690BCD-40E9-47D1-BCE4-F9337C067F1D}"/>
+                <a16:creationId xmlns:a16="http://schemas.microsoft.com/office/drawing/2014/main" id="{C49D2169-71D5-4807-96C3-88E0A678EA04}"/>
               </a:ext>
             </a:extLst>
           </p:cNvPr>
@@ -2751,7 +2751,7 @@
           <p:cNvPr id="8" name="">
             <a:extLst xmlns:a="http://schemas.openxmlformats.org/drawingml/2006/main">
               <a:ext uri="{FF2B5EF4-FFF2-40B4-BE49-F238E27FC236}">
-                <a16:creationId xmlns:a16="http://schemas.microsoft.com/office/drawing/2014/main" id="{A88D5EFA-B9D7-4C81-A28E-7206CD8287D9}"/>
+                <a16:creationId xmlns:a16="http://schemas.microsoft.com/office/drawing/2014/main" id="{61BABF33-35C2-406C-B0A3-05C38E6B141A}"/>
               </a:ext>
             </a:extLst>
           </p:cNvPr>
@@ -2808,7 +2808,7 @@
           <p:cNvPr id="9" name="">
             <a:extLst xmlns:a="http://schemas.openxmlformats.org/drawingml/2006/main">
               <a:ext uri="{FF2B5EF4-FFF2-40B4-BE49-F238E27FC236}">
-                <a16:creationId xmlns:a16="http://schemas.microsoft.com/office/drawing/2014/main" id="{E6A69365-3B5A-4DFD-AFCD-ED34FAA5216C}"/>
+                <a16:creationId xmlns:a16="http://schemas.microsoft.com/office/drawing/2014/main" id="{7BE55C7B-BA2C-4B47-84A5-2FDF475B32AC}"/>
               </a:ext>
             </a:extLst>
           </p:cNvPr>
@@ -2865,7 +2865,7 @@
           <p:cNvPr id="10" name="">
             <a:extLst xmlns:a="http://schemas.openxmlformats.org/drawingml/2006/main">
               <a:ext uri="{FF2B5EF4-FFF2-40B4-BE49-F238E27FC236}">
-                <a16:creationId xmlns:a16="http://schemas.microsoft.com/office/drawing/2014/main" id="{A4392970-5C6C-496B-89BC-4C4E2EDF6222}"/>
+                <a16:creationId xmlns:a16="http://schemas.microsoft.com/office/drawing/2014/main" id="{C2B79377-58E0-4597-A537-E74A6863F33D}"/>
               </a:ext>
             </a:extLst>
           </p:cNvPr>
@@ -2922,7 +2922,7 @@
           <p:cNvPr id="11" name="">
             <a:extLst xmlns:a="http://schemas.openxmlformats.org/drawingml/2006/main">
               <a:ext uri="{FF2B5EF4-FFF2-40B4-BE49-F238E27FC236}">
-                <a16:creationId xmlns:a16="http://schemas.microsoft.com/office/drawing/2014/main" id="{222D66AA-6566-42F6-BD57-B1E88A9FF36D}"/>
+                <a16:creationId xmlns:a16="http://schemas.microsoft.com/office/drawing/2014/main" id="{E9FA7C2C-54F2-4220-BAC3-9731D2973172}"/>
               </a:ext>
             </a:extLst>
           </p:cNvPr>
@@ -2979,7 +2979,7 @@
           <p:cNvPr id="12" name="">
             <a:extLst xmlns:a="http://schemas.openxmlformats.org/drawingml/2006/main">
               <a:ext uri="{FF2B5EF4-FFF2-40B4-BE49-F238E27FC236}">
-                <a16:creationId xmlns:a16="http://schemas.microsoft.com/office/drawing/2014/main" id="{A3A8B446-1E33-4B7B-8D7C-8172A8A899E3}"/>
+                <a16:creationId xmlns:a16="http://schemas.microsoft.com/office/drawing/2014/main" id="{D0897893-F267-4FD2-AD52-2564AB1702A8}"/>
               </a:ext>
             </a:extLst>
           </p:cNvPr>
@@ -3036,7 +3036,7 @@
           <p:cNvPr id="13" name="">
             <a:extLst xmlns:a="http://schemas.openxmlformats.org/drawingml/2006/main">
               <a:ext uri="{FF2B5EF4-FFF2-40B4-BE49-F238E27FC236}">
-                <a16:creationId xmlns:a16="http://schemas.microsoft.com/office/drawing/2014/main" id="{8AA2EC7A-1D2A-4514-828A-0B228756E8BD}"/>
+                <a16:creationId xmlns:a16="http://schemas.microsoft.com/office/drawing/2014/main" id="{FEFFFCBB-ACE0-4C08-8188-F2D2D5F840FA}"/>
               </a:ext>
             </a:extLst>
           </p:cNvPr>
@@ -3091,7 +3091,7 @@
     </p:spTree>
     <p:extLst>
       <p:ext uri="{BB962C8B-B14F-4D97-AF65-F5344CB8AC3E}">
-        <p14:creationId xmlns:p14="http://schemas.microsoft.com/office/powerpoint/2010/main" val="691149494"/>
+        <p14:creationId xmlns:p14="http://schemas.microsoft.com/office/powerpoint/2010/main" val="1240125255"/>
       </p:ext>
     </p:extLst>
   </p:cSld>
@@ -3292,7 +3292,7 @@
           <p:cNvPr id="19" name="">
             <a:extLst xmlns:a="http://schemas.openxmlformats.org/drawingml/2006/main">
               <a:ext uri="{FF2B5EF4-FFF2-40B4-BE49-F238E27FC236}">
-                <a16:creationId xmlns:a16="http://schemas.microsoft.com/office/drawing/2014/main" id="{37957980-105C-4ECB-8708-9FE957402358}"/>
+                <a16:creationId xmlns:a16="http://schemas.microsoft.com/office/drawing/2014/main" id="{D44B0288-ADBC-4C74-A231-ADB7B32FFFF7}"/>
               </a:ext>
             </a:extLst>
           </p:cNvPr>
@@ -3324,7 +3324,7 @@
           <p:cNvPr id="2" name="">
             <a:extLst xmlns:a="http://schemas.openxmlformats.org/drawingml/2006/main">
               <a:ext uri="{FF2B5EF4-FFF2-40B4-BE49-F238E27FC236}">
-                <a16:creationId xmlns:a16="http://schemas.microsoft.com/office/drawing/2014/main" id="{EB8A08CC-45FE-4362-81C2-B25EFBD6BAC2}"/>
+                <a16:creationId xmlns:a16="http://schemas.microsoft.com/office/drawing/2014/main" id="{EE3C2F06-9E0A-4E5F-9952-2D3D1CD34D31}"/>
               </a:ext>
             </a:extLst>
           </p:cNvPr>
@@ -3381,7 +3381,7 @@
           <p:cNvPr id="3" name="">
             <a:extLst xmlns:a="http://schemas.openxmlformats.org/drawingml/2006/main">
               <a:ext uri="{FF2B5EF4-FFF2-40B4-BE49-F238E27FC236}">
-                <a16:creationId xmlns:a16="http://schemas.microsoft.com/office/drawing/2014/main" id="{879F4EDA-C251-4CBE-ABE7-B5527B43DCD4}"/>
+                <a16:creationId xmlns:a16="http://schemas.microsoft.com/office/drawing/2014/main" id="{22457066-824A-41E3-B558-C71E1BBEFCC7}"/>
               </a:ext>
             </a:extLst>
           </p:cNvPr>
@@ -3413,7 +3413,7 @@
           <p:cNvPr id="4" name="">
             <a:extLst xmlns:a="http://schemas.openxmlformats.org/drawingml/2006/main">
               <a:ext uri="{FF2B5EF4-FFF2-40B4-BE49-F238E27FC236}">
-                <a16:creationId xmlns:a16="http://schemas.microsoft.com/office/drawing/2014/main" id="{23F0ECD8-241B-47CA-A319-199DEFB848EE}"/>
+                <a16:creationId xmlns:a16="http://schemas.microsoft.com/office/drawing/2014/main" id="{722B9CB8-13E2-4754-9ADA-D0240B152DF6}"/>
               </a:ext>
             </a:extLst>
           </p:cNvPr>
@@ -3470,7 +3470,7 @@
           <p:cNvPr id="5" name="">
             <a:extLst xmlns:a="http://schemas.openxmlformats.org/drawingml/2006/main">
               <a:ext uri="{FF2B5EF4-FFF2-40B4-BE49-F238E27FC236}">
-                <a16:creationId xmlns:a16="http://schemas.microsoft.com/office/drawing/2014/main" id="{AB6E060C-C5F3-40C6-AC7E-39F768D9A1B3}"/>
+                <a16:creationId xmlns:a16="http://schemas.microsoft.com/office/drawing/2014/main" id="{D2C3BECE-7927-4F49-AFB0-D3EF686E28F7}"/>
               </a:ext>
             </a:extLst>
           </p:cNvPr>
@@ -3527,7 +3527,7 @@
           <p:cNvPr id="6" name="">
             <a:extLst xmlns:a="http://schemas.openxmlformats.org/drawingml/2006/main">
               <a:ext uri="{FF2B5EF4-FFF2-40B4-BE49-F238E27FC236}">
-                <a16:creationId xmlns:a16="http://schemas.microsoft.com/office/drawing/2014/main" id="{27179140-8DCD-4D8D-A0AF-15ACB574C42E}"/>
+                <a16:creationId xmlns:a16="http://schemas.microsoft.com/office/drawing/2014/main" id="{163B7640-E889-46A4-9462-0CD5059B6378}"/>
               </a:ext>
             </a:extLst>
           </p:cNvPr>
@@ -3584,7 +3584,7 @@
           <p:cNvPr id="7" name="">
             <a:extLst xmlns:a="http://schemas.openxmlformats.org/drawingml/2006/main">
               <a:ext uri="{FF2B5EF4-FFF2-40B4-BE49-F238E27FC236}">
-                <a16:creationId xmlns:a16="http://schemas.microsoft.com/office/drawing/2014/main" id="{99194941-C163-423F-B2BE-A63C93862D61}"/>
+                <a16:creationId xmlns:a16="http://schemas.microsoft.com/office/drawing/2014/main" id="{53192F61-DBE4-45CC-BC00-FCFE58484B6C}"/>
               </a:ext>
             </a:extLst>
           </p:cNvPr>
@@ -3616,7 +3616,7 @@
           <p:cNvPr id="8" name="">
             <a:extLst xmlns:a="http://schemas.openxmlformats.org/drawingml/2006/main">
               <a:ext uri="{FF2B5EF4-FFF2-40B4-BE49-F238E27FC236}">
-                <a16:creationId xmlns:a16="http://schemas.microsoft.com/office/drawing/2014/main" id="{B5901716-7351-4780-B433-B5B1137E2E43}"/>
+                <a16:creationId xmlns:a16="http://schemas.microsoft.com/office/drawing/2014/main" id="{7314D968-4E54-4574-B83E-E0B6DFC7577A}"/>
               </a:ext>
             </a:extLst>
           </p:cNvPr>
@@ -3673,7 +3673,7 @@
           <p:cNvPr id="9" name="">
             <a:extLst xmlns:a="http://schemas.openxmlformats.org/drawingml/2006/main">
               <a:ext uri="{FF2B5EF4-FFF2-40B4-BE49-F238E27FC236}">
-                <a16:creationId xmlns:a16="http://schemas.microsoft.com/office/drawing/2014/main" id="{9F14AB1A-CF3B-4906-9471-8B4A8CFB97BB}"/>
+                <a16:creationId xmlns:a16="http://schemas.microsoft.com/office/drawing/2014/main" id="{DF51B48B-CD97-4D44-B1F7-9A552B926D5B}"/>
               </a:ext>
             </a:extLst>
           </p:cNvPr>
@@ -3730,7 +3730,7 @@
           <p:cNvPr id="10" name="">
             <a:extLst xmlns:a="http://schemas.openxmlformats.org/drawingml/2006/main">
               <a:ext uri="{FF2B5EF4-FFF2-40B4-BE49-F238E27FC236}">
-                <a16:creationId xmlns:a16="http://schemas.microsoft.com/office/drawing/2014/main" id="{670273AD-32E1-4356-95F8-30B4A8FD05BA}"/>
+                <a16:creationId xmlns:a16="http://schemas.microsoft.com/office/drawing/2014/main" id="{65725C9B-9B04-47CA-8570-955D0A028833}"/>
               </a:ext>
             </a:extLst>
           </p:cNvPr>
@@ -3787,7 +3787,7 @@
           <p:cNvPr id="11" name="">
             <a:extLst xmlns:a="http://schemas.openxmlformats.org/drawingml/2006/main">
               <a:ext uri="{FF2B5EF4-FFF2-40B4-BE49-F238E27FC236}">
-                <a16:creationId xmlns:a16="http://schemas.microsoft.com/office/drawing/2014/main" id="{2741C08F-34EB-42B8-AE5B-60823E99CD98}"/>
+                <a16:creationId xmlns:a16="http://schemas.microsoft.com/office/drawing/2014/main" id="{3C35C33F-FEA9-46B9-9FAF-0F4F732BBCDA}"/>
               </a:ext>
             </a:extLst>
           </p:cNvPr>
@@ -3821,7 +3821,7 @@
           <p:cNvPr id="12" name="">
             <a:extLst xmlns:a="http://schemas.openxmlformats.org/drawingml/2006/main">
               <a:ext uri="{FF2B5EF4-FFF2-40B4-BE49-F238E27FC236}">
-                <a16:creationId xmlns:a16="http://schemas.microsoft.com/office/drawing/2014/main" id="{C14C4BD7-7C9D-4EF0-9323-150464512E56}"/>
+                <a16:creationId xmlns:a16="http://schemas.microsoft.com/office/drawing/2014/main" id="{5506B795-4F36-413D-830C-B9ECCDB3B4B1}"/>
               </a:ext>
             </a:extLst>
           </p:cNvPr>
@@ -3878,7 +3878,7 @@
           <p:cNvPr id="13" name="">
             <a:extLst xmlns:a="http://schemas.openxmlformats.org/drawingml/2006/main">
               <a:ext uri="{FF2B5EF4-FFF2-40B4-BE49-F238E27FC236}">
-                <a16:creationId xmlns:a16="http://schemas.microsoft.com/office/drawing/2014/main" id="{F0C5E8CB-7457-459B-B578-32DD00065F04}"/>
+                <a16:creationId xmlns:a16="http://schemas.microsoft.com/office/drawing/2014/main" id="{80CDD21C-5E3A-4506-80DE-52C7C902CCD7}"/>
               </a:ext>
             </a:extLst>
           </p:cNvPr>
@@ -3935,7 +3935,7 @@
           <p:cNvPr id="14" name="">
             <a:extLst xmlns:a="http://schemas.openxmlformats.org/drawingml/2006/main">
               <a:ext uri="{FF2B5EF4-FFF2-40B4-BE49-F238E27FC236}">
-                <a16:creationId xmlns:a16="http://schemas.microsoft.com/office/drawing/2014/main" id="{E3FE4B6F-D5CD-4AAE-8B7B-6249718ADFF5}"/>
+                <a16:creationId xmlns:a16="http://schemas.microsoft.com/office/drawing/2014/main" id="{3249B3E7-14EC-4E11-94E5-8B7FD1837815}"/>
               </a:ext>
             </a:extLst>
           </p:cNvPr>
@@ -3992,7 +3992,7 @@
           <p:cNvPr id="15" name="">
             <a:extLst xmlns:a="http://schemas.openxmlformats.org/drawingml/2006/main">
               <a:ext uri="{FF2B5EF4-FFF2-40B4-BE49-F238E27FC236}">
-                <a16:creationId xmlns:a16="http://schemas.microsoft.com/office/drawing/2014/main" id="{E46D83C2-FFF8-4C2E-94BC-CEBC90D807D4}"/>
+                <a16:creationId xmlns:a16="http://schemas.microsoft.com/office/drawing/2014/main" id="{FE302BBD-60CF-453C-A744-FCF1D60EE715}"/>
               </a:ext>
             </a:extLst>
           </p:cNvPr>
@@ -4026,7 +4026,7 @@
           <p:cNvPr id="16" name="">
             <a:extLst xmlns:a="http://schemas.openxmlformats.org/drawingml/2006/main">
               <a:ext uri="{FF2B5EF4-FFF2-40B4-BE49-F238E27FC236}">
-                <a16:creationId xmlns:a16="http://schemas.microsoft.com/office/drawing/2014/main" id="{57676E24-17F4-4851-97EB-DBE05F02B55D}"/>
+                <a16:creationId xmlns:a16="http://schemas.microsoft.com/office/drawing/2014/main" id="{C9F33669-991C-4AE8-B07E-53DAE0D3D598}"/>
               </a:ext>
             </a:extLst>
           </p:cNvPr>
@@ -4083,7 +4083,7 @@
           <p:cNvPr id="17" name="">
             <a:extLst xmlns:a="http://schemas.openxmlformats.org/drawingml/2006/main">
               <a:ext uri="{FF2B5EF4-FFF2-40B4-BE49-F238E27FC236}">
-                <a16:creationId xmlns:a16="http://schemas.microsoft.com/office/drawing/2014/main" id="{4E26B5DB-41A9-4366-8C3E-94A109BD70B8}"/>
+                <a16:creationId xmlns:a16="http://schemas.microsoft.com/office/drawing/2014/main" id="{52321D0A-2630-469B-A982-38AC015103F1}"/>
               </a:ext>
             </a:extLst>
           </p:cNvPr>
@@ -4140,7 +4140,7 @@
           <p:cNvPr id="18" name="">
             <a:extLst xmlns:a="http://schemas.openxmlformats.org/drawingml/2006/main">
               <a:ext uri="{FF2B5EF4-FFF2-40B4-BE49-F238E27FC236}">
-                <a16:creationId xmlns:a16="http://schemas.microsoft.com/office/drawing/2014/main" id="{86AE4F88-9514-4287-A3A8-29FD253448B9}"/>
+                <a16:creationId xmlns:a16="http://schemas.microsoft.com/office/drawing/2014/main" id="{3D724455-4A31-4299-A07F-95E17D30C8FA}"/>
               </a:ext>
             </a:extLst>
           </p:cNvPr>
@@ -4195,7 +4195,7 @@
     </p:spTree>
     <p:extLst>
       <p:ext uri="{BB962C8B-B14F-4D97-AF65-F5344CB8AC3E}">
-        <p14:creationId xmlns:p14="http://schemas.microsoft.com/office/powerpoint/2010/main" val="646805746"/>
+        <p14:creationId xmlns:p14="http://schemas.microsoft.com/office/powerpoint/2010/main" val="836242353"/>
       </p:ext>
     </p:extLst>
   </p:cSld>
@@ -4350,7 +4350,7 @@
           <p:cNvPr id="23" name="">
             <a:extLst xmlns:a="http://schemas.openxmlformats.org/drawingml/2006/main">
               <a:ext uri="{FF2B5EF4-FFF2-40B4-BE49-F238E27FC236}">
-                <a16:creationId xmlns:a16="http://schemas.microsoft.com/office/drawing/2014/main" id="{238B3EB2-D0CA-439D-B719-83D01AC6F4BA}"/>
+                <a16:creationId xmlns:a16="http://schemas.microsoft.com/office/drawing/2014/main" id="{42B86673-CDC7-419C-9A4A-748359A28CC8}"/>
               </a:ext>
             </a:extLst>
           </p:cNvPr>
@@ -4382,7 +4382,7 @@
           <p:cNvPr id="2" name="">
             <a:extLst xmlns:a="http://schemas.openxmlformats.org/drawingml/2006/main">
               <a:ext uri="{FF2B5EF4-FFF2-40B4-BE49-F238E27FC236}">
-                <a16:creationId xmlns:a16="http://schemas.microsoft.com/office/drawing/2014/main" id="{0C8EFD1E-714D-49CC-B082-7AFA7FD7A563}"/>
+                <a16:creationId xmlns:a16="http://schemas.microsoft.com/office/drawing/2014/main" id="{F979DF30-7E87-4B19-A97B-B76292995D64}"/>
               </a:ext>
             </a:extLst>
           </p:cNvPr>
@@ -4439,7 +4439,7 @@
           <p:cNvPr id="3" name="">
             <a:extLst xmlns:a="http://schemas.openxmlformats.org/drawingml/2006/main">
               <a:ext uri="{FF2B5EF4-FFF2-40B4-BE49-F238E27FC236}">
-                <a16:creationId xmlns:a16="http://schemas.microsoft.com/office/drawing/2014/main" id="{E7CA8B4B-13B1-47BE-BB79-B358B4CEE7B0}"/>
+                <a16:creationId xmlns:a16="http://schemas.microsoft.com/office/drawing/2014/main" id="{7A380FA1-84A7-4381-8210-09B745210DD9}"/>
               </a:ext>
             </a:extLst>
           </p:cNvPr>
@@ -4471,7 +4471,7 @@
           <p:cNvPr id="4" name="">
             <a:extLst xmlns:a="http://schemas.openxmlformats.org/drawingml/2006/main">
               <a:ext uri="{FF2B5EF4-FFF2-40B4-BE49-F238E27FC236}">
-                <a16:creationId xmlns:a16="http://schemas.microsoft.com/office/drawing/2014/main" id="{3923F74C-4947-4261-977F-961D3FAE69C3}"/>
+                <a16:creationId xmlns:a16="http://schemas.microsoft.com/office/drawing/2014/main" id="{3481CB6A-7804-4536-89DF-D8ED6AF654D5}"/>
               </a:ext>
             </a:extLst>
           </p:cNvPr>
@@ -4528,7 +4528,7 @@
           <p:cNvPr id="5" name="">
             <a:extLst xmlns:a="http://schemas.openxmlformats.org/drawingml/2006/main">
               <a:ext uri="{FF2B5EF4-FFF2-40B4-BE49-F238E27FC236}">
-                <a16:creationId xmlns:a16="http://schemas.microsoft.com/office/drawing/2014/main" id="{7CDE1E89-0BFE-4746-B068-A34ED84CE9DE}"/>
+                <a16:creationId xmlns:a16="http://schemas.microsoft.com/office/drawing/2014/main" id="{7A4F05A8-FF93-47E0-B887-24829269DC67}"/>
               </a:ext>
             </a:extLst>
           </p:cNvPr>
@@ -4585,7 +4585,7 @@
           <p:cNvPr id="6" name="">
             <a:extLst xmlns:a="http://schemas.openxmlformats.org/drawingml/2006/main">
               <a:ext uri="{FF2B5EF4-FFF2-40B4-BE49-F238E27FC236}">
-                <a16:creationId xmlns:a16="http://schemas.microsoft.com/office/drawing/2014/main" id="{C28687ED-C1AD-49FA-ABCF-26338728E664}"/>
+                <a16:creationId xmlns:a16="http://schemas.microsoft.com/office/drawing/2014/main" id="{58F34977-0B09-4BB4-9012-788FF9726271}"/>
               </a:ext>
             </a:extLst>
           </p:cNvPr>
@@ -4642,7 +4642,7 @@
           <p:cNvPr id="7" name="">
             <a:extLst xmlns:a="http://schemas.openxmlformats.org/drawingml/2006/main">
               <a:ext uri="{FF2B5EF4-FFF2-40B4-BE49-F238E27FC236}">
-                <a16:creationId xmlns:a16="http://schemas.microsoft.com/office/drawing/2014/main" id="{9F6078B0-41B6-4CCB-AD0B-8D88F6D70C40}"/>
+                <a16:creationId xmlns:a16="http://schemas.microsoft.com/office/drawing/2014/main" id="{5C5A8EA6-6613-4976-9E50-EBA382E6F6EB}"/>
               </a:ext>
             </a:extLst>
           </p:cNvPr>
@@ -4674,7 +4674,7 @@
           <p:cNvPr id="8" name="">
             <a:extLst xmlns:a="http://schemas.openxmlformats.org/drawingml/2006/main">
               <a:ext uri="{FF2B5EF4-FFF2-40B4-BE49-F238E27FC236}">
-                <a16:creationId xmlns:a16="http://schemas.microsoft.com/office/drawing/2014/main" id="{A3BFED69-0816-4DB0-8656-A810F28319A1}"/>
+                <a16:creationId xmlns:a16="http://schemas.microsoft.com/office/drawing/2014/main" id="{04770D85-B7BC-431A-8040-9B8492150EB3}"/>
               </a:ext>
             </a:extLst>
           </p:cNvPr>
@@ -4731,7 +4731,7 @@
           <p:cNvPr id="9" name="">
             <a:extLst xmlns:a="http://schemas.openxmlformats.org/drawingml/2006/main">
               <a:ext uri="{FF2B5EF4-FFF2-40B4-BE49-F238E27FC236}">
-                <a16:creationId xmlns:a16="http://schemas.microsoft.com/office/drawing/2014/main" id="{B7649F0C-EE9D-496A-9EC5-E071B5D466E1}"/>
+                <a16:creationId xmlns:a16="http://schemas.microsoft.com/office/drawing/2014/main" id="{DA033DFB-979B-4CFA-9E05-B7B654E1C486}"/>
               </a:ext>
             </a:extLst>
           </p:cNvPr>
@@ -4788,7 +4788,7 @@
           <p:cNvPr id="10" name="">
             <a:extLst xmlns:a="http://schemas.openxmlformats.org/drawingml/2006/main">
               <a:ext uri="{FF2B5EF4-FFF2-40B4-BE49-F238E27FC236}">
-                <a16:creationId xmlns:a16="http://schemas.microsoft.com/office/drawing/2014/main" id="{D2AD422F-45D6-41A9-A378-DB677F01B95D}"/>
+                <a16:creationId xmlns:a16="http://schemas.microsoft.com/office/drawing/2014/main" id="{241E5B8B-37AF-472A-AC8D-96A1995B27B4}"/>
               </a:ext>
             </a:extLst>
           </p:cNvPr>
@@ -4822,7 +4822,7 @@
           <p:cNvPr id="11" name="">
             <a:extLst xmlns:a="http://schemas.openxmlformats.org/drawingml/2006/main">
               <a:ext uri="{FF2B5EF4-FFF2-40B4-BE49-F238E27FC236}">
-                <a16:creationId xmlns:a16="http://schemas.microsoft.com/office/drawing/2014/main" id="{A83B0C03-AF6F-4DC1-A87D-962D55CDBE30}"/>
+                <a16:creationId xmlns:a16="http://schemas.microsoft.com/office/drawing/2014/main" id="{82073D37-6E93-4DC2-B5CE-EA3BB07E6E42}"/>
               </a:ext>
             </a:extLst>
           </p:cNvPr>
@@ -4854,7 +4854,7 @@
           <p:cNvPr id="12" name="">
             <a:extLst xmlns:a="http://schemas.openxmlformats.org/drawingml/2006/main">
               <a:ext uri="{FF2B5EF4-FFF2-40B4-BE49-F238E27FC236}">
-                <a16:creationId xmlns:a16="http://schemas.microsoft.com/office/drawing/2014/main" id="{4CD5ABFB-D63C-4D7F-9D2B-226BE296ECB5}"/>
+                <a16:creationId xmlns:a16="http://schemas.microsoft.com/office/drawing/2014/main" id="{767931D6-3C3B-431A-A912-55804D51289C}"/>
               </a:ext>
             </a:extLst>
           </p:cNvPr>
@@ -4911,7 +4911,7 @@
           <p:cNvPr id="13" name="">
             <a:extLst xmlns:a="http://schemas.openxmlformats.org/drawingml/2006/main">
               <a:ext uri="{FF2B5EF4-FFF2-40B4-BE49-F238E27FC236}">
-                <a16:creationId xmlns:a16="http://schemas.microsoft.com/office/drawing/2014/main" id="{6DA9DF53-7140-4483-B4A8-A4039F533438}"/>
+                <a16:creationId xmlns:a16="http://schemas.microsoft.com/office/drawing/2014/main" id="{C16CBBF0-A5EE-4600-8897-88FDB3F8D5D4}"/>
               </a:ext>
             </a:extLst>
           </p:cNvPr>
@@ -4968,7 +4968,7 @@
           <p:cNvPr id="14" name="">
             <a:extLst xmlns:a="http://schemas.openxmlformats.org/drawingml/2006/main">
               <a:ext uri="{FF2B5EF4-FFF2-40B4-BE49-F238E27FC236}">
-                <a16:creationId xmlns:a16="http://schemas.microsoft.com/office/drawing/2014/main" id="{17F43A3B-BB74-47EF-8B85-A956DFAA16D9}"/>
+                <a16:creationId xmlns:a16="http://schemas.microsoft.com/office/drawing/2014/main" id="{5126C0E0-8C9A-4C17-8450-7A141E37E701}"/>
               </a:ext>
             </a:extLst>
           </p:cNvPr>
@@ -5002,7 +5002,7 @@
           <p:cNvPr id="15" name="">
             <a:extLst xmlns:a="http://schemas.openxmlformats.org/drawingml/2006/main">
               <a:ext uri="{FF2B5EF4-FFF2-40B4-BE49-F238E27FC236}">
-                <a16:creationId xmlns:a16="http://schemas.microsoft.com/office/drawing/2014/main" id="{4D75BB09-B77C-454E-A563-2A1C546CA510}"/>
+                <a16:creationId xmlns:a16="http://schemas.microsoft.com/office/drawing/2014/main" id="{AEF0CB83-19A9-4C8C-BFE8-75BF6B819768}"/>
               </a:ext>
             </a:extLst>
           </p:cNvPr>
@@ -5034,7 +5034,7 @@
           <p:cNvPr id="16" name="">
             <a:extLst xmlns:a="http://schemas.openxmlformats.org/drawingml/2006/main">
               <a:ext uri="{FF2B5EF4-FFF2-40B4-BE49-F238E27FC236}">
-                <a16:creationId xmlns:a16="http://schemas.microsoft.com/office/drawing/2014/main" id="{D7071E93-C9A3-4F8E-A93B-2609DD77A6CA}"/>
+                <a16:creationId xmlns:a16="http://schemas.microsoft.com/office/drawing/2014/main" id="{676131C5-818A-44FB-A26C-09F486F2F70C}"/>
               </a:ext>
             </a:extLst>
           </p:cNvPr>
@@ -5091,7 +5091,7 @@
           <p:cNvPr id="17" name="">
             <a:extLst xmlns:a="http://schemas.openxmlformats.org/drawingml/2006/main">
               <a:ext uri="{FF2B5EF4-FFF2-40B4-BE49-F238E27FC236}">
-                <a16:creationId xmlns:a16="http://schemas.microsoft.com/office/drawing/2014/main" id="{BF1D91C7-58E3-44D5-8C4C-FAA9F59FEC57}"/>
+                <a16:creationId xmlns:a16="http://schemas.microsoft.com/office/drawing/2014/main" id="{BACF8F54-C6A6-43F0-8B73-CE8BF0EAA5FC}"/>
               </a:ext>
             </a:extLst>
           </p:cNvPr>
@@ -5148,7 +5148,7 @@
           <p:cNvPr id="18" name="">
             <a:extLst xmlns:a="http://schemas.openxmlformats.org/drawingml/2006/main">
               <a:ext uri="{FF2B5EF4-FFF2-40B4-BE49-F238E27FC236}">
-                <a16:creationId xmlns:a16="http://schemas.microsoft.com/office/drawing/2014/main" id="{0888E961-FCD8-48EF-9FD9-DB665808EF82}"/>
+                <a16:creationId xmlns:a16="http://schemas.microsoft.com/office/drawing/2014/main" id="{692D301D-3F1A-4BF7-A6B7-1ED48FCC3538}"/>
               </a:ext>
             </a:extLst>
           </p:cNvPr>
@@ -5182,7 +5182,7 @@
           <p:cNvPr id="19" name="">
             <a:extLst xmlns:a="http://schemas.openxmlformats.org/drawingml/2006/main">
               <a:ext uri="{FF2B5EF4-FFF2-40B4-BE49-F238E27FC236}">
-                <a16:creationId xmlns:a16="http://schemas.microsoft.com/office/drawing/2014/main" id="{6E7EC71B-75D4-4D17-9B27-721A9E593D10}"/>
+                <a16:creationId xmlns:a16="http://schemas.microsoft.com/office/drawing/2014/main" id="{890F9E2A-7C0A-4F67-86D7-F1648407853B}"/>
               </a:ext>
             </a:extLst>
           </p:cNvPr>
@@ -5214,7 +5214,7 @@
           <p:cNvPr id="20" name="">
             <a:extLst xmlns:a="http://schemas.openxmlformats.org/drawingml/2006/main">
               <a:ext uri="{FF2B5EF4-FFF2-40B4-BE49-F238E27FC236}">
-                <a16:creationId xmlns:a16="http://schemas.microsoft.com/office/drawing/2014/main" id="{6369B8D6-4BC2-428B-9B56-9C220E3C2E0A}"/>
+                <a16:creationId xmlns:a16="http://schemas.microsoft.com/office/drawing/2014/main" id="{B8A2125A-CD3A-4F4A-9ABD-36CCAB3FDF7E}"/>
               </a:ext>
             </a:extLst>
           </p:cNvPr>
@@ -5271,7 +5271,7 @@
           <p:cNvPr id="21" name="">
             <a:extLst xmlns:a="http://schemas.openxmlformats.org/drawingml/2006/main">
               <a:ext uri="{FF2B5EF4-FFF2-40B4-BE49-F238E27FC236}">
-                <a16:creationId xmlns:a16="http://schemas.microsoft.com/office/drawing/2014/main" id="{2F3545BE-F0B6-412E-9F9A-323E1F76E65B}"/>
+                <a16:creationId xmlns:a16="http://schemas.microsoft.com/office/drawing/2014/main" id="{211CDB10-7F37-4778-8C66-C360D94A7E04}"/>
               </a:ext>
             </a:extLst>
           </p:cNvPr>
@@ -5328,7 +5328,7 @@
           <p:cNvPr id="22" name="">
             <a:extLst xmlns:a="http://schemas.openxmlformats.org/drawingml/2006/main">
               <a:ext uri="{FF2B5EF4-FFF2-40B4-BE49-F238E27FC236}">
-                <a16:creationId xmlns:a16="http://schemas.microsoft.com/office/drawing/2014/main" id="{74260520-75E5-40E5-9045-A24EC2C13CC4}"/>
+                <a16:creationId xmlns:a16="http://schemas.microsoft.com/office/drawing/2014/main" id="{155D4ACF-27C3-4198-8250-0366C587AB82}"/>
               </a:ext>
             </a:extLst>
           </p:cNvPr>
@@ -5383,7 +5383,7 @@
     </p:spTree>
     <p:extLst>
       <p:ext uri="{BB962C8B-B14F-4D97-AF65-F5344CB8AC3E}">
-        <p14:creationId xmlns:p14="http://schemas.microsoft.com/office/powerpoint/2010/main" val="1372025276"/>
+        <p14:creationId xmlns:p14="http://schemas.microsoft.com/office/powerpoint/2010/main" val="1929802517"/>
       </p:ext>
     </p:extLst>
   </p:cSld>
@@ -5584,7 +5584,7 @@
           <p:cNvPr id="23" name="">
             <a:extLst xmlns:a="http://schemas.openxmlformats.org/drawingml/2006/main">
               <a:ext uri="{FF2B5EF4-FFF2-40B4-BE49-F238E27FC236}">
-                <a16:creationId xmlns:a16="http://schemas.microsoft.com/office/drawing/2014/main" id="{6B43105D-C868-4963-BC8A-7DF201943893}"/>
+                <a16:creationId xmlns:a16="http://schemas.microsoft.com/office/drawing/2014/main" id="{768A62E5-738E-413B-9036-F3DC8E8C22E5}"/>
               </a:ext>
             </a:extLst>
           </p:cNvPr>
@@ -5616,7 +5616,7 @@
           <p:cNvPr id="2" name="">
             <a:extLst xmlns:a="http://schemas.openxmlformats.org/drawingml/2006/main">
               <a:ext uri="{FF2B5EF4-FFF2-40B4-BE49-F238E27FC236}">
-                <a16:creationId xmlns:a16="http://schemas.microsoft.com/office/drawing/2014/main" id="{6CA6F650-F0F7-498E-816E-8F9D2E8FB1D8}"/>
+                <a16:creationId xmlns:a16="http://schemas.microsoft.com/office/drawing/2014/main" id="{9DCFAC26-80EA-4854-80BD-CC6C5EB7244E}"/>
               </a:ext>
             </a:extLst>
           </p:cNvPr>
@@ -5673,7 +5673,7 @@
           <p:cNvPr id="3" name="">
             <a:extLst xmlns:a="http://schemas.openxmlformats.org/drawingml/2006/main">
               <a:ext uri="{FF2B5EF4-FFF2-40B4-BE49-F238E27FC236}">
-                <a16:creationId xmlns:a16="http://schemas.microsoft.com/office/drawing/2014/main" id="{9690EA18-6C8A-4C76-AF59-184F2867AE84}"/>
+                <a16:creationId xmlns:a16="http://schemas.microsoft.com/office/drawing/2014/main" id="{93581EB9-6B81-4338-916C-0749AED720F4}"/>
               </a:ext>
             </a:extLst>
           </p:cNvPr>
@@ -5705,7 +5705,7 @@
           <p:cNvPr id="4" name="">
             <a:extLst xmlns:a="http://schemas.openxmlformats.org/drawingml/2006/main">
               <a:ext uri="{FF2B5EF4-FFF2-40B4-BE49-F238E27FC236}">
-                <a16:creationId xmlns:a16="http://schemas.microsoft.com/office/drawing/2014/main" id="{8764BCC0-94D6-4F1D-9B10-3FC0F8BF7292}"/>
+                <a16:creationId xmlns:a16="http://schemas.microsoft.com/office/drawing/2014/main" id="{1B602F88-194A-41A9-8CF8-D82B0F777167}"/>
               </a:ext>
             </a:extLst>
           </p:cNvPr>
@@ -5762,7 +5762,7 @@
           <p:cNvPr id="5" name="">
             <a:extLst xmlns:a="http://schemas.openxmlformats.org/drawingml/2006/main">
               <a:ext uri="{FF2B5EF4-FFF2-40B4-BE49-F238E27FC236}">
-                <a16:creationId xmlns:a16="http://schemas.microsoft.com/office/drawing/2014/main" id="{1965A556-90D5-420C-9395-9DA8255002D6}"/>
+                <a16:creationId xmlns:a16="http://schemas.microsoft.com/office/drawing/2014/main" id="{1F093CC9-480D-4D22-9050-3A9DF1F049DA}"/>
               </a:ext>
             </a:extLst>
           </p:cNvPr>
@@ -5819,7 +5819,7 @@
           <p:cNvPr id="6" name="">
             <a:extLst xmlns:a="http://schemas.openxmlformats.org/drawingml/2006/main">
               <a:ext uri="{FF2B5EF4-FFF2-40B4-BE49-F238E27FC236}">
-                <a16:creationId xmlns:a16="http://schemas.microsoft.com/office/drawing/2014/main" id="{6DF29006-D35E-465E-B419-797F193E076F}"/>
+                <a16:creationId xmlns:a16="http://schemas.microsoft.com/office/drawing/2014/main" id="{4B903973-5878-47E7-BB66-9B614DACB28D}"/>
               </a:ext>
             </a:extLst>
           </p:cNvPr>
@@ -5876,7 +5876,7 @@
           <p:cNvPr id="7" name="">
             <a:extLst xmlns:a="http://schemas.openxmlformats.org/drawingml/2006/main">
               <a:ext uri="{FF2B5EF4-FFF2-40B4-BE49-F238E27FC236}">
-                <a16:creationId xmlns:a16="http://schemas.microsoft.com/office/drawing/2014/main" id="{DEA39A9C-F054-4C18-98EC-7D78984CE272}"/>
+                <a16:creationId xmlns:a16="http://schemas.microsoft.com/office/drawing/2014/main" id="{0E8CF976-8A95-493F-8FE6-39198428B106}"/>
               </a:ext>
             </a:extLst>
           </p:cNvPr>
@@ -5908,7 +5908,7 @@
           <p:cNvPr id="8" name="">
             <a:extLst xmlns:a="http://schemas.openxmlformats.org/drawingml/2006/main">
               <a:ext uri="{FF2B5EF4-FFF2-40B4-BE49-F238E27FC236}">
-                <a16:creationId xmlns:a16="http://schemas.microsoft.com/office/drawing/2014/main" id="{2791F5E8-F39E-429F-9651-CE0058F37F50}"/>
+                <a16:creationId xmlns:a16="http://schemas.microsoft.com/office/drawing/2014/main" id="{0397090C-B229-435A-937A-A2D9671A86B6}"/>
               </a:ext>
             </a:extLst>
           </p:cNvPr>
@@ -5965,7 +5965,7 @@
           <p:cNvPr id="9" name="">
             <a:extLst xmlns:a="http://schemas.openxmlformats.org/drawingml/2006/main">
               <a:ext uri="{FF2B5EF4-FFF2-40B4-BE49-F238E27FC236}">
-                <a16:creationId xmlns:a16="http://schemas.microsoft.com/office/drawing/2014/main" id="{5D5976BC-2ABE-42F7-A9C4-078E00EBD8B3}"/>
+                <a16:creationId xmlns:a16="http://schemas.microsoft.com/office/drawing/2014/main" id="{760C6F31-6D8E-4E89-A250-94147589076C}"/>
               </a:ext>
             </a:extLst>
           </p:cNvPr>
@@ -6022,7 +6022,7 @@
           <p:cNvPr id="10" name="">
             <a:extLst xmlns:a="http://schemas.openxmlformats.org/drawingml/2006/main">
               <a:ext uri="{FF2B5EF4-FFF2-40B4-BE49-F238E27FC236}">
-                <a16:creationId xmlns:a16="http://schemas.microsoft.com/office/drawing/2014/main" id="{30D27B5E-63E7-4E3F-A74C-9B005DF5E84D}"/>
+                <a16:creationId xmlns:a16="http://schemas.microsoft.com/office/drawing/2014/main" id="{D8483D61-8788-4017-AA33-7F6FC82B6354}"/>
               </a:ext>
             </a:extLst>
           </p:cNvPr>
@@ -6056,7 +6056,7 @@
           <p:cNvPr id="11" name="">
             <a:extLst xmlns:a="http://schemas.openxmlformats.org/drawingml/2006/main">
               <a:ext uri="{FF2B5EF4-FFF2-40B4-BE49-F238E27FC236}">
-                <a16:creationId xmlns:a16="http://schemas.microsoft.com/office/drawing/2014/main" id="{58BCF8AB-1CF3-476B-A4CF-A639192D380F}"/>
+                <a16:creationId xmlns:a16="http://schemas.microsoft.com/office/drawing/2014/main" id="{FAFF629F-AE94-4F47-93C7-CD9E0E193F6D}"/>
               </a:ext>
             </a:extLst>
           </p:cNvPr>
@@ -6088,7 +6088,7 @@
           <p:cNvPr id="12" name="">
             <a:extLst xmlns:a="http://schemas.openxmlformats.org/drawingml/2006/main">
               <a:ext uri="{FF2B5EF4-FFF2-40B4-BE49-F238E27FC236}">
-                <a16:creationId xmlns:a16="http://schemas.microsoft.com/office/drawing/2014/main" id="{C75F2762-3B85-46BE-9FB9-87E5DD13AAE7}"/>
+                <a16:creationId xmlns:a16="http://schemas.microsoft.com/office/drawing/2014/main" id="{81B95F5E-5490-4627-8C69-A0BA6C357099}"/>
               </a:ext>
             </a:extLst>
           </p:cNvPr>
@@ -6145,7 +6145,7 @@
           <p:cNvPr id="13" name="">
             <a:extLst xmlns:a="http://schemas.openxmlformats.org/drawingml/2006/main">
               <a:ext uri="{FF2B5EF4-FFF2-40B4-BE49-F238E27FC236}">
-                <a16:creationId xmlns:a16="http://schemas.microsoft.com/office/drawing/2014/main" id="{9864FF7F-9549-4C7E-829B-7D7E9181B18A}"/>
+                <a16:creationId xmlns:a16="http://schemas.microsoft.com/office/drawing/2014/main" id="{3F1AC684-4D87-4C40-B386-9EE8385C7193}"/>
               </a:ext>
             </a:extLst>
           </p:cNvPr>
@@ -6202,7 +6202,7 @@
           <p:cNvPr id="14" name="">
             <a:extLst xmlns:a="http://schemas.openxmlformats.org/drawingml/2006/main">
               <a:ext uri="{FF2B5EF4-FFF2-40B4-BE49-F238E27FC236}">
-                <a16:creationId xmlns:a16="http://schemas.microsoft.com/office/drawing/2014/main" id="{0F2FE603-8324-4FEE-999E-86A19C07CC10}"/>
+                <a16:creationId xmlns:a16="http://schemas.microsoft.com/office/drawing/2014/main" id="{EF77B28A-FEEA-4967-833C-7AFA23316B4F}"/>
               </a:ext>
             </a:extLst>
           </p:cNvPr>
@@ -6236,7 +6236,7 @@
           <p:cNvPr id="15" name="">
             <a:extLst xmlns:a="http://schemas.openxmlformats.org/drawingml/2006/main">
               <a:ext uri="{FF2B5EF4-FFF2-40B4-BE49-F238E27FC236}">
-                <a16:creationId xmlns:a16="http://schemas.microsoft.com/office/drawing/2014/main" id="{3C38B67E-6DCF-4239-8414-22F8BDB86C2E}"/>
+                <a16:creationId xmlns:a16="http://schemas.microsoft.com/office/drawing/2014/main" id="{68FB8B34-00A6-4857-B36D-0110AC1B77BA}"/>
               </a:ext>
             </a:extLst>
           </p:cNvPr>
@@ -6268,7 +6268,7 @@
           <p:cNvPr id="16" name="">
             <a:extLst xmlns:a="http://schemas.openxmlformats.org/drawingml/2006/main">
               <a:ext uri="{FF2B5EF4-FFF2-40B4-BE49-F238E27FC236}">
-                <a16:creationId xmlns:a16="http://schemas.microsoft.com/office/drawing/2014/main" id="{19040CC2-D583-4AC5-A266-816F96239F66}"/>
+                <a16:creationId xmlns:a16="http://schemas.microsoft.com/office/drawing/2014/main" id="{073FE515-60EC-40B1-B4D0-52056863F7E7}"/>
               </a:ext>
             </a:extLst>
           </p:cNvPr>
@@ -6325,7 +6325,7 @@
           <p:cNvPr id="17" name="">
             <a:extLst xmlns:a="http://schemas.openxmlformats.org/drawingml/2006/main">
               <a:ext uri="{FF2B5EF4-FFF2-40B4-BE49-F238E27FC236}">
-                <a16:creationId xmlns:a16="http://schemas.microsoft.com/office/drawing/2014/main" id="{93DBB67F-6610-4794-B876-554FA61561CA}"/>
+                <a16:creationId xmlns:a16="http://schemas.microsoft.com/office/drawing/2014/main" id="{C12484B4-1389-427F-BEE4-9DC6B4BE0D82}"/>
               </a:ext>
             </a:extLst>
           </p:cNvPr>
@@ -6382,7 +6382,7 @@
           <p:cNvPr id="18" name="">
             <a:extLst xmlns:a="http://schemas.openxmlformats.org/drawingml/2006/main">
               <a:ext uri="{FF2B5EF4-FFF2-40B4-BE49-F238E27FC236}">
-                <a16:creationId xmlns:a16="http://schemas.microsoft.com/office/drawing/2014/main" id="{150511F8-EB92-40BA-A246-908DF907A547}"/>
+                <a16:creationId xmlns:a16="http://schemas.microsoft.com/office/drawing/2014/main" id="{B3F6434E-FCE3-4F7F-AD27-754595FACC15}"/>
               </a:ext>
             </a:extLst>
           </p:cNvPr>
@@ -6416,7 +6416,7 @@
           <p:cNvPr id="19" name="">
             <a:extLst xmlns:a="http://schemas.openxmlformats.org/drawingml/2006/main">
               <a:ext uri="{FF2B5EF4-FFF2-40B4-BE49-F238E27FC236}">
-                <a16:creationId xmlns:a16="http://schemas.microsoft.com/office/drawing/2014/main" id="{2B2803F2-C808-4F94-8015-4F970CA97464}"/>
+                <a16:creationId xmlns:a16="http://schemas.microsoft.com/office/drawing/2014/main" id="{BE3B83E1-F559-4E8B-9C79-8F65A12A7903}"/>
               </a:ext>
             </a:extLst>
           </p:cNvPr>
@@ -6448,7 +6448,7 @@
           <p:cNvPr id="20" name="">
             <a:extLst xmlns:a="http://schemas.openxmlformats.org/drawingml/2006/main">
               <a:ext uri="{FF2B5EF4-FFF2-40B4-BE49-F238E27FC236}">
-                <a16:creationId xmlns:a16="http://schemas.microsoft.com/office/drawing/2014/main" id="{0EB3D1E7-BE6C-413F-B762-AA40D5BFFEDF}"/>
+                <a16:creationId xmlns:a16="http://schemas.microsoft.com/office/drawing/2014/main" id="{E3871370-02E2-41EB-9CD5-9150D83E4997}"/>
               </a:ext>
             </a:extLst>
           </p:cNvPr>
@@ -6505,7 +6505,7 @@
           <p:cNvPr id="21" name="">
             <a:extLst xmlns:a="http://schemas.openxmlformats.org/drawingml/2006/main">
               <a:ext uri="{FF2B5EF4-FFF2-40B4-BE49-F238E27FC236}">
-                <a16:creationId xmlns:a16="http://schemas.microsoft.com/office/drawing/2014/main" id="{1AB7B9AC-3EA9-4B49-A418-9EDC610652A0}"/>
+                <a16:creationId xmlns:a16="http://schemas.microsoft.com/office/drawing/2014/main" id="{7AD3BCE4-5974-4C47-9600-7CE208E18684}"/>
               </a:ext>
             </a:extLst>
           </p:cNvPr>
@@ -6562,7 +6562,7 @@
           <p:cNvPr id="22" name="">
             <a:extLst xmlns:a="http://schemas.openxmlformats.org/drawingml/2006/main">
               <a:ext uri="{FF2B5EF4-FFF2-40B4-BE49-F238E27FC236}">
-                <a16:creationId xmlns:a16="http://schemas.microsoft.com/office/drawing/2014/main" id="{ADB0CE2D-5300-4039-BD73-6587CFD1FA65}"/>
+                <a16:creationId xmlns:a16="http://schemas.microsoft.com/office/drawing/2014/main" id="{A8DF9C47-1819-4524-8618-BEF18645DFBD}"/>
               </a:ext>
             </a:extLst>
           </p:cNvPr>
@@ -6617,7 +6617,7 @@
     </p:spTree>
     <p:extLst>
       <p:ext uri="{BB962C8B-B14F-4D97-AF65-F5344CB8AC3E}">
-        <p14:creationId xmlns:p14="http://schemas.microsoft.com/office/powerpoint/2010/main" val="1345194924"/>
+        <p14:creationId xmlns:p14="http://schemas.microsoft.com/office/powerpoint/2010/main" val="1112824358"/>
       </p:ext>
     </p:extLst>
   </p:cSld>
@@ -6818,7 +6818,7 @@
           <p:cNvPr id="16" name="">
             <a:extLst xmlns:a="http://schemas.openxmlformats.org/drawingml/2006/main">
               <a:ext uri="{FF2B5EF4-FFF2-40B4-BE49-F238E27FC236}">
-                <a16:creationId xmlns:a16="http://schemas.microsoft.com/office/drawing/2014/main" id="{1608015F-42EC-44B1-8BF9-A54E6942CCDE}"/>
+                <a16:creationId xmlns:a16="http://schemas.microsoft.com/office/drawing/2014/main" id="{FDDADDB0-066A-41CB-9A65-252E602B0E9E}"/>
               </a:ext>
             </a:extLst>
           </p:cNvPr>
@@ -6850,7 +6850,7 @@
           <p:cNvPr id="2" name="">
             <a:extLst xmlns:a="http://schemas.openxmlformats.org/drawingml/2006/main">
               <a:ext uri="{FF2B5EF4-FFF2-40B4-BE49-F238E27FC236}">
-                <a16:creationId xmlns:a16="http://schemas.microsoft.com/office/drawing/2014/main" id="{3750B1D3-B26B-482D-BE31-3674CC50A09D}"/>
+                <a16:creationId xmlns:a16="http://schemas.microsoft.com/office/drawing/2014/main" id="{05AF2B5D-3837-433E-A15D-512BF1654CBD}"/>
               </a:ext>
             </a:extLst>
           </p:cNvPr>
@@ -6907,7 +6907,7 @@
           <p:cNvPr id="3" name="">
             <a:extLst xmlns:a="http://schemas.openxmlformats.org/drawingml/2006/main">
               <a:ext uri="{FF2B5EF4-FFF2-40B4-BE49-F238E27FC236}">
-                <a16:creationId xmlns:a16="http://schemas.microsoft.com/office/drawing/2014/main" id="{D968B992-1E86-4C70-A1A8-76B8BFED1A39}"/>
+                <a16:creationId xmlns:a16="http://schemas.microsoft.com/office/drawing/2014/main" id="{75E2A96E-60E7-4EF0-BAB3-4324571D737C}"/>
               </a:ext>
             </a:extLst>
           </p:cNvPr>
@@ -6939,7 +6939,7 @@
           <p:cNvPr id="4" name="">
             <a:extLst xmlns:a="http://schemas.openxmlformats.org/drawingml/2006/main">
               <a:ext uri="{FF2B5EF4-FFF2-40B4-BE49-F238E27FC236}">
-                <a16:creationId xmlns:a16="http://schemas.microsoft.com/office/drawing/2014/main" id="{CF6AE82A-92AE-4EC0-BE8F-DE292E8DA1F0}"/>
+                <a16:creationId xmlns:a16="http://schemas.microsoft.com/office/drawing/2014/main" id="{DCC14FFC-3D82-4F86-8B16-99E981AB3BE9}"/>
               </a:ext>
             </a:extLst>
           </p:cNvPr>
@@ -6996,7 +6996,7 @@
           <p:cNvPr id="5" name="">
             <a:extLst xmlns:a="http://schemas.openxmlformats.org/drawingml/2006/main">
               <a:ext uri="{FF2B5EF4-FFF2-40B4-BE49-F238E27FC236}">
-                <a16:creationId xmlns:a16="http://schemas.microsoft.com/office/drawing/2014/main" id="{33611903-52F8-45F7-9392-20045090369F}"/>
+                <a16:creationId xmlns:a16="http://schemas.microsoft.com/office/drawing/2014/main" id="{D71517F7-05D0-4706-AB4F-76A823C4B005}"/>
               </a:ext>
             </a:extLst>
           </p:cNvPr>
@@ -7053,7 +7053,7 @@
           <p:cNvPr id="6" name="">
             <a:extLst xmlns:a="http://schemas.openxmlformats.org/drawingml/2006/main">
               <a:ext uri="{FF2B5EF4-FFF2-40B4-BE49-F238E27FC236}">
-                <a16:creationId xmlns:a16="http://schemas.microsoft.com/office/drawing/2014/main" id="{B1626D46-4BBE-4BDE-AE00-5EE3CFEC628E}"/>
+                <a16:creationId xmlns:a16="http://schemas.microsoft.com/office/drawing/2014/main" id="{D111E639-DB32-4117-8C96-B5BC20E7E022}"/>
               </a:ext>
             </a:extLst>
           </p:cNvPr>
@@ -7110,7 +7110,7 @@
           <p:cNvPr id="7" name="">
             <a:extLst xmlns:a="http://schemas.openxmlformats.org/drawingml/2006/main">
               <a:ext uri="{FF2B5EF4-FFF2-40B4-BE49-F238E27FC236}">
-                <a16:creationId xmlns:a16="http://schemas.microsoft.com/office/drawing/2014/main" id="{78FAA50E-2EC4-4943-963C-5F26334B91BF}"/>
+                <a16:creationId xmlns:a16="http://schemas.microsoft.com/office/drawing/2014/main" id="{EE6BB8D2-0CE7-43B8-A80B-43661F2BA392}"/>
               </a:ext>
             </a:extLst>
           </p:cNvPr>
@@ -7142,7 +7142,7 @@
           <p:cNvPr id="8" name="">
             <a:extLst xmlns:a="http://schemas.openxmlformats.org/drawingml/2006/main">
               <a:ext uri="{FF2B5EF4-FFF2-40B4-BE49-F238E27FC236}">
-                <a16:creationId xmlns:a16="http://schemas.microsoft.com/office/drawing/2014/main" id="{6AC85435-5C66-407D-8540-0D7F9F6FAB55}"/>
+                <a16:creationId xmlns:a16="http://schemas.microsoft.com/office/drawing/2014/main" id="{A748F9D8-E951-42E1-88E8-A512CC2087A7}"/>
               </a:ext>
             </a:extLst>
           </p:cNvPr>
@@ -7199,7 +7199,7 @@
           <p:cNvPr id="9" name="">
             <a:extLst xmlns:a="http://schemas.openxmlformats.org/drawingml/2006/main">
               <a:ext uri="{FF2B5EF4-FFF2-40B4-BE49-F238E27FC236}">
-                <a16:creationId xmlns:a16="http://schemas.microsoft.com/office/drawing/2014/main" id="{CC099914-9CCA-433F-89ED-39ADE61BCDEF}"/>
+                <a16:creationId xmlns:a16="http://schemas.microsoft.com/office/drawing/2014/main" id="{433FBB58-8E25-4733-BB8C-150D6ACDBF51}"/>
               </a:ext>
             </a:extLst>
           </p:cNvPr>
@@ -7256,7 +7256,7 @@
           <p:cNvPr id="10" name="">
             <a:extLst xmlns:a="http://schemas.openxmlformats.org/drawingml/2006/main">
               <a:ext uri="{FF2B5EF4-FFF2-40B4-BE49-F238E27FC236}">
-                <a16:creationId xmlns:a16="http://schemas.microsoft.com/office/drawing/2014/main" id="{2A98DC8E-EF70-4AC8-A753-F6810646D97C}"/>
+                <a16:creationId xmlns:a16="http://schemas.microsoft.com/office/drawing/2014/main" id="{1C90E433-A0B5-432A-AA1F-7FD9D0A689B4}"/>
               </a:ext>
             </a:extLst>
           </p:cNvPr>
@@ -7313,7 +7313,7 @@
           <p:cNvPr id="11" name="">
             <a:extLst xmlns:a="http://schemas.openxmlformats.org/drawingml/2006/main">
               <a:ext uri="{FF2B5EF4-FFF2-40B4-BE49-F238E27FC236}">
-                <a16:creationId xmlns:a16="http://schemas.microsoft.com/office/drawing/2014/main" id="{F23529B6-B692-4CA9-8A76-A03F7B2A9913}"/>
+                <a16:creationId xmlns:a16="http://schemas.microsoft.com/office/drawing/2014/main" id="{D6B7C6F3-91F6-440C-A51C-467B392C9015}"/>
               </a:ext>
             </a:extLst>
           </p:cNvPr>
@@ -7345,7 +7345,7 @@
           <p:cNvPr id="12" name="">
             <a:extLst xmlns:a="http://schemas.openxmlformats.org/drawingml/2006/main">
               <a:ext uri="{FF2B5EF4-FFF2-40B4-BE49-F238E27FC236}">
-                <a16:creationId xmlns:a16="http://schemas.microsoft.com/office/drawing/2014/main" id="{320BFDC2-9C48-4E28-B72B-F4EE8E9AC970}"/>
+                <a16:creationId xmlns:a16="http://schemas.microsoft.com/office/drawing/2014/main" id="{B64E68CC-2535-4B1A-8935-6158EE1FA951}"/>
               </a:ext>
             </a:extLst>
           </p:cNvPr>
@@ -7402,7 +7402,7 @@
           <p:cNvPr id="13" name="">
             <a:extLst xmlns:a="http://schemas.openxmlformats.org/drawingml/2006/main">
               <a:ext uri="{FF2B5EF4-FFF2-40B4-BE49-F238E27FC236}">
-                <a16:creationId xmlns:a16="http://schemas.microsoft.com/office/drawing/2014/main" id="{39B87C49-D606-40E2-B178-A8CD33F9F5A3}"/>
+                <a16:creationId xmlns:a16="http://schemas.microsoft.com/office/drawing/2014/main" id="{9AEE9E95-5E4C-4730-8522-8B302A37A81E}"/>
               </a:ext>
             </a:extLst>
           </p:cNvPr>
@@ -7459,7 +7459,7 @@
           <p:cNvPr id="14" name="">
             <a:extLst xmlns:a="http://schemas.openxmlformats.org/drawingml/2006/main">
               <a:ext uri="{FF2B5EF4-FFF2-40B4-BE49-F238E27FC236}">
-                <a16:creationId xmlns:a16="http://schemas.microsoft.com/office/drawing/2014/main" id="{3C44DB35-8EAF-4343-99AE-358C28246D9B}"/>
+                <a16:creationId xmlns:a16="http://schemas.microsoft.com/office/drawing/2014/main" id="{587F5DEE-F984-43AF-B7EB-425B040CD042}"/>
               </a:ext>
             </a:extLst>
           </p:cNvPr>
@@ -7516,7 +7516,7 @@
           <p:cNvPr id="15" name="">
             <a:extLst xmlns:a="http://schemas.openxmlformats.org/drawingml/2006/main">
               <a:ext uri="{FF2B5EF4-FFF2-40B4-BE49-F238E27FC236}">
-                <a16:creationId xmlns:a16="http://schemas.microsoft.com/office/drawing/2014/main" id="{D819AFF1-05D5-4D8A-AB29-6936DCFEBC49}"/>
+                <a16:creationId xmlns:a16="http://schemas.microsoft.com/office/drawing/2014/main" id="{8FB3D23D-9D67-4B86-963F-9B2F35E8D4FE}"/>
               </a:ext>
             </a:extLst>
           </p:cNvPr>
@@ -7571,7 +7571,7 @@
     </p:spTree>
     <p:extLst>
       <p:ext uri="{BB962C8B-B14F-4D97-AF65-F5344CB8AC3E}">
-        <p14:creationId xmlns:p14="http://schemas.microsoft.com/office/powerpoint/2010/main" val="2012335982"/>
+        <p14:creationId xmlns:p14="http://schemas.microsoft.com/office/powerpoint/2010/main" val="371095785"/>
       </p:ext>
     </p:extLst>
   </p:cSld>
@@ -7772,7 +7772,7 @@
           <p:cNvPr id="23" name="">
             <a:extLst xmlns:a="http://schemas.openxmlformats.org/drawingml/2006/main">
               <a:ext uri="{FF2B5EF4-FFF2-40B4-BE49-F238E27FC236}">
-                <a16:creationId xmlns:a16="http://schemas.microsoft.com/office/drawing/2014/main" id="{C50284AB-0DA6-4004-9D5F-633172AD1D0C}"/>
+                <a16:creationId xmlns:a16="http://schemas.microsoft.com/office/drawing/2014/main" id="{93B42A76-E7E6-431C-B77A-1F7F46A65431}"/>
               </a:ext>
             </a:extLst>
           </p:cNvPr>
@@ -7804,7 +7804,7 @@
           <p:cNvPr id="2" name="">
             <a:extLst xmlns:a="http://schemas.openxmlformats.org/drawingml/2006/main">
               <a:ext uri="{FF2B5EF4-FFF2-40B4-BE49-F238E27FC236}">
-                <a16:creationId xmlns:a16="http://schemas.microsoft.com/office/drawing/2014/main" id="{50FC9609-B34C-471C-AC55-D4453C71DA8C}"/>
+                <a16:creationId xmlns:a16="http://schemas.microsoft.com/office/drawing/2014/main" id="{679BD0D7-2A5D-4208-A86A-63F9081EE462}"/>
               </a:ext>
             </a:extLst>
           </p:cNvPr>
@@ -7861,7 +7861,7 @@
           <p:cNvPr id="3" name="">
             <a:extLst xmlns:a="http://schemas.openxmlformats.org/drawingml/2006/main">
               <a:ext uri="{FF2B5EF4-FFF2-40B4-BE49-F238E27FC236}">
-                <a16:creationId xmlns:a16="http://schemas.microsoft.com/office/drawing/2014/main" id="{49DA5AE2-D890-4A3C-AF1F-55412C7E4226}"/>
+                <a16:creationId xmlns:a16="http://schemas.microsoft.com/office/drawing/2014/main" id="{23FB94E4-3BBA-4525-AC59-3CBE3E04B798}"/>
               </a:ext>
             </a:extLst>
           </p:cNvPr>
@@ -7893,7 +7893,7 @@
           <p:cNvPr id="4" name="">
             <a:extLst xmlns:a="http://schemas.openxmlformats.org/drawingml/2006/main">
               <a:ext uri="{FF2B5EF4-FFF2-40B4-BE49-F238E27FC236}">
-                <a16:creationId xmlns:a16="http://schemas.microsoft.com/office/drawing/2014/main" id="{7ACA2DBA-C29A-4125-8FB9-1FCE284D688D}"/>
+                <a16:creationId xmlns:a16="http://schemas.microsoft.com/office/drawing/2014/main" id="{8147F989-C7B8-48B2-9FD7-05D131422105}"/>
               </a:ext>
             </a:extLst>
           </p:cNvPr>
@@ -7950,7 +7950,7 @@
           <p:cNvPr id="5" name="">
             <a:extLst xmlns:a="http://schemas.openxmlformats.org/drawingml/2006/main">
               <a:ext uri="{FF2B5EF4-FFF2-40B4-BE49-F238E27FC236}">
-                <a16:creationId xmlns:a16="http://schemas.microsoft.com/office/drawing/2014/main" id="{6350E5DE-94A4-4C79-9D8B-2CABD94352AF}"/>
+                <a16:creationId xmlns:a16="http://schemas.microsoft.com/office/drawing/2014/main" id="{C8D23FDE-7567-491C-A24E-A8FA9374E7DA}"/>
               </a:ext>
             </a:extLst>
           </p:cNvPr>
@@ -8007,7 +8007,7 @@
           <p:cNvPr id="6" name="">
             <a:extLst xmlns:a="http://schemas.openxmlformats.org/drawingml/2006/main">
               <a:ext uri="{FF2B5EF4-FFF2-40B4-BE49-F238E27FC236}">
-                <a16:creationId xmlns:a16="http://schemas.microsoft.com/office/drawing/2014/main" id="{6874A1C6-6B09-4B42-B9DA-9CAC4553A4A2}"/>
+                <a16:creationId xmlns:a16="http://schemas.microsoft.com/office/drawing/2014/main" id="{723038F9-5EF1-4439-BDA9-86EB9EA0330E}"/>
               </a:ext>
             </a:extLst>
           </p:cNvPr>
@@ -8064,7 +8064,7 @@
           <p:cNvPr id="7" name="">
             <a:extLst xmlns:a="http://schemas.openxmlformats.org/drawingml/2006/main">
               <a:ext uri="{FF2B5EF4-FFF2-40B4-BE49-F238E27FC236}">
-                <a16:creationId xmlns:a16="http://schemas.microsoft.com/office/drawing/2014/main" id="{13346E26-336F-4C27-A223-AAE8FE5E4FE4}"/>
+                <a16:creationId xmlns:a16="http://schemas.microsoft.com/office/drawing/2014/main" id="{3A6F79DD-7968-47E2-8382-5353E2AD5AC9}"/>
               </a:ext>
             </a:extLst>
           </p:cNvPr>
@@ -8096,7 +8096,7 @@
           <p:cNvPr id="8" name="">
             <a:extLst xmlns:a="http://schemas.openxmlformats.org/drawingml/2006/main">
               <a:ext uri="{FF2B5EF4-FFF2-40B4-BE49-F238E27FC236}">
-                <a16:creationId xmlns:a16="http://schemas.microsoft.com/office/drawing/2014/main" id="{5AAF542C-9427-4086-B734-48E27E695F29}"/>
+                <a16:creationId xmlns:a16="http://schemas.microsoft.com/office/drawing/2014/main" id="{87EF6CE8-4102-4923-BA14-AA47FA06CCD5}"/>
               </a:ext>
             </a:extLst>
           </p:cNvPr>
@@ -8153,7 +8153,7 @@
           <p:cNvPr id="9" name="">
             <a:extLst xmlns:a="http://schemas.openxmlformats.org/drawingml/2006/main">
               <a:ext uri="{FF2B5EF4-FFF2-40B4-BE49-F238E27FC236}">
-                <a16:creationId xmlns:a16="http://schemas.microsoft.com/office/drawing/2014/main" id="{57367C82-49F4-4F47-BBAF-47B46D93E560}"/>
+                <a16:creationId xmlns:a16="http://schemas.microsoft.com/office/drawing/2014/main" id="{E0C4F003-2612-4976-883A-F22781BD5E3F}"/>
               </a:ext>
             </a:extLst>
           </p:cNvPr>
@@ -8210,19 +8210,19 @@
           <p:cNvPr id="10" name="">
             <a:extLst xmlns:a="http://schemas.openxmlformats.org/drawingml/2006/main">
               <a:ext uri="{FF2B5EF4-FFF2-40B4-BE49-F238E27FC236}">
-                <a16:creationId xmlns:a16="http://schemas.microsoft.com/office/drawing/2014/main" id="{5445977A-26FC-4470-8044-DEA6B979A87A}"/>
-              </a:ext>
-            </a:extLst>
-          </p:cNvPr>
-          <p:cNvSpPr>
-            <a:spLocks xmlns:a="http://schemas.openxmlformats.org/drawingml/2006/main" noGrp="1"/>
-          </p:cNvSpPr>
-          <p:nvPr/>
-        </p:nvSpPr>
-        <p:spPr>
-          <a:xfrm xmlns:a="http://schemas.openxmlformats.org/drawingml/2006/main">
-            <a:off x="914400" y="1257300"/>
-            <a:ext cx="10363200" cy="781050"/>
+                <a16:creationId xmlns:a16="http://schemas.microsoft.com/office/drawing/2014/main" id="{462C39C4-D7F5-4A1C-AAB6-56F2AAB2817E}"/>
+              </a:ext>
+            </a:extLst>
+          </p:cNvPr>
+          <p:cNvSpPr>
+            <a:spLocks xmlns:a="http://schemas.openxmlformats.org/drawingml/2006/main" noGrp="1"/>
+          </p:cNvSpPr>
+          <p:nvPr/>
+        </p:nvSpPr>
+        <p:spPr>
+          <a:xfrm xmlns:a="http://schemas.openxmlformats.org/drawingml/2006/main">
+            <a:off x="857250" y="1219200"/>
+            <a:ext cx="10477500" cy="742950"/>
           </a:xfrm>
           <a:prstGeom xmlns:a="http://schemas.openxmlformats.org/drawingml/2006/main" prst="rect">
             <a:avLst/>
@@ -8239,7 +8239,7 @@
           <a:lstStyle xmlns:a="http://schemas.openxmlformats.org/drawingml/2006/main"/>
           <a:p xmlns:a="http://schemas.openxmlformats.org/drawingml/2006/main">
             <a:pPr algn="ctr">
-              <a:defRPr sz="2175" b="1">
+              <a:defRPr sz="2100" b="1">
                 <a:solidFill>
                   <a:srgbClr val="17253A"/>
                 </a:solidFill>
@@ -8249,7 +8249,7 @@
               </a:defRPr>
             </a:pPr>
             <a:r>
-              <a:rPr sz="2175" b="1">
+              <a:rPr sz="2100" b="1">
                 <a:solidFill>
                   <a:srgbClr val="17253A"/>
                 </a:solidFill>
@@ -8267,28 +8267,30 @@
           <p:cNvPr id="11" name="">
             <a:extLst xmlns:a="http://schemas.openxmlformats.org/drawingml/2006/main">
               <a:ext uri="{FF2B5EF4-FFF2-40B4-BE49-F238E27FC236}">
-                <a16:creationId xmlns:a16="http://schemas.microsoft.com/office/drawing/2014/main" id="{B81C5A06-7DC4-498A-A00A-688502F61DBF}"/>
-              </a:ext>
-            </a:extLst>
-          </p:cNvPr>
-          <p:cNvSpPr>
-            <a:spLocks xmlns:a="http://schemas.openxmlformats.org/drawingml/2006/main" noGrp="1"/>
-          </p:cNvSpPr>
-          <p:nvPr/>
-        </p:nvSpPr>
-        <p:spPr>
-          <a:xfrm xmlns:a="http://schemas.openxmlformats.org/drawingml/2006/main">
-            <a:off x="1000125" y="2247900"/>
-            <a:ext cx="476250" cy="476250"/>
-          </a:xfrm>
-          <a:prstGeom xmlns:a="http://schemas.openxmlformats.org/drawingml/2006/main" prst="ellipse">
+                <a16:creationId xmlns:a16="http://schemas.microsoft.com/office/drawing/2014/main" id="{6D65D29A-F1C6-4D6B-B4C5-9D25EB6F832D}"/>
+              </a:ext>
+            </a:extLst>
+          </p:cNvPr>
+          <p:cNvSpPr>
+            <a:spLocks xmlns:a="http://schemas.openxmlformats.org/drawingml/2006/main" noGrp="1"/>
+          </p:cNvSpPr>
+          <p:nvPr/>
+        </p:nvSpPr>
+        <p:spPr>
+          <a:xfrm xmlns:a="http://schemas.openxmlformats.org/drawingml/2006/main">
+            <a:off x="971550" y="2124075"/>
+            <a:ext cx="38100" cy="3524250"/>
+          </a:xfrm>
+          <a:prstGeom xmlns:a="http://schemas.openxmlformats.org/drawingml/2006/main" prst="rect">
             <a:avLst/>
           </a:prstGeom>
           <a:solidFill xmlns:a="http://schemas.openxmlformats.org/drawingml/2006/main">
-            <a:srgbClr val="18324A"/>
+            <a:srgbClr val="2C6E73"/>
           </a:solidFill>
           <a:ln xmlns:a="http://schemas.openxmlformats.org/drawingml/2006/main" w="0">
-            <a:noFill/>
+            <a:solidFill>
+              <a:srgbClr val="2C6E73"/>
+            </a:solidFill>
           </a:ln>
         </p:spPr>
       </p:sp>
@@ -8297,19 +8299,19 @@
           <p:cNvPr id="12" name="">
             <a:extLst xmlns:a="http://schemas.openxmlformats.org/drawingml/2006/main">
               <a:ext uri="{FF2B5EF4-FFF2-40B4-BE49-F238E27FC236}">
-                <a16:creationId xmlns:a16="http://schemas.microsoft.com/office/drawing/2014/main" id="{5DC98DE5-D9F3-446D-98FE-F7C9054B105D}"/>
-              </a:ext>
-            </a:extLst>
-          </p:cNvPr>
-          <p:cNvSpPr>
-            <a:spLocks xmlns:a="http://schemas.openxmlformats.org/drawingml/2006/main" noGrp="1"/>
-          </p:cNvSpPr>
-          <p:nvPr/>
-        </p:nvSpPr>
-        <p:spPr>
-          <a:xfrm xmlns:a="http://schemas.openxmlformats.org/drawingml/2006/main">
-            <a:off x="1000125" y="2276475"/>
-            <a:ext cx="476250" cy="419100"/>
+                <a16:creationId xmlns:a16="http://schemas.microsoft.com/office/drawing/2014/main" id="{96A3E01C-48A9-4B40-8BFF-7FFAE0BAABF2}"/>
+              </a:ext>
+            </a:extLst>
+          </p:cNvPr>
+          <p:cNvSpPr>
+            <a:spLocks xmlns:a="http://schemas.openxmlformats.org/drawingml/2006/main" noGrp="1"/>
+          </p:cNvSpPr>
+          <p:nvPr/>
+        </p:nvSpPr>
+        <p:spPr>
+          <a:xfrm xmlns:a="http://schemas.openxmlformats.org/drawingml/2006/main">
+            <a:off x="1162050" y="2200275"/>
+            <a:ext cx="400050" cy="400050"/>
           </a:xfrm>
           <a:prstGeom xmlns:a="http://schemas.openxmlformats.org/drawingml/2006/main" prst="rect">
             <a:avLst/>
@@ -8326,9 +8328,9 @@
           <a:lstStyle xmlns:a="http://schemas.openxmlformats.org/drawingml/2006/main"/>
           <a:p xmlns:a="http://schemas.openxmlformats.org/drawingml/2006/main">
             <a:pPr algn="ctr">
-              <a:defRPr sz="1350" b="1">
-                <a:solidFill>
-                  <a:srgbClr val="FFFFFF"/>
+              <a:defRPr sz="1125" b="1">
+                <a:solidFill>
+                  <a:srgbClr val="2C6E73"/>
                 </a:solidFill>
                 <a:latin typeface="Arial"/>
                 <a:ea typeface="Arial"/>
@@ -8336,9 +8338,9 @@
               </a:defRPr>
             </a:pPr>
             <a:r>
-              <a:rPr sz="1350" b="1">
-                <a:solidFill>
-                  <a:srgbClr val="FFFFFF"/>
+              <a:rPr sz="1125" b="1">
+                <a:solidFill>
+                  <a:srgbClr val="2C6E73"/>
                 </a:solidFill>
                 <a:latin typeface="Arial"/>
                 <a:ea typeface="Arial"/>
@@ -8354,19 +8356,19 @@
           <p:cNvPr id="13" name="">
             <a:extLst xmlns:a="http://schemas.openxmlformats.org/drawingml/2006/main">
               <a:ext uri="{FF2B5EF4-FFF2-40B4-BE49-F238E27FC236}">
-                <a16:creationId xmlns:a16="http://schemas.microsoft.com/office/drawing/2014/main" id="{A35AF05C-3175-43F4-B1C8-A95E10B10E4E}"/>
-              </a:ext>
-            </a:extLst>
-          </p:cNvPr>
-          <p:cNvSpPr>
-            <a:spLocks xmlns:a="http://schemas.openxmlformats.org/drawingml/2006/main" noGrp="1"/>
-          </p:cNvSpPr>
-          <p:nvPr/>
-        </p:nvSpPr>
-        <p:spPr>
-          <a:xfrm xmlns:a="http://schemas.openxmlformats.org/drawingml/2006/main">
-            <a:off x="1714500" y="2181225"/>
-            <a:ext cx="9429750" cy="609600"/>
+                <a16:creationId xmlns:a16="http://schemas.microsoft.com/office/drawing/2014/main" id="{55A54253-B945-4FCC-952E-A667176528A6}"/>
+              </a:ext>
+            </a:extLst>
+          </p:cNvPr>
+          <p:cNvSpPr>
+            <a:spLocks xmlns:a="http://schemas.openxmlformats.org/drawingml/2006/main" noGrp="1"/>
+          </p:cNvSpPr>
+          <p:nvPr/>
+        </p:nvSpPr>
+        <p:spPr>
+          <a:xfrm xmlns:a="http://schemas.openxmlformats.org/drawingml/2006/main">
+            <a:off x="1714500" y="2114550"/>
+            <a:ext cx="9525000" cy="809625"/>
           </a:xfrm>
           <a:prstGeom xmlns:a="http://schemas.openxmlformats.org/drawingml/2006/main" prst="rect">
             <a:avLst/>
@@ -8383,7 +8385,7 @@
           <a:lstStyle xmlns:a="http://schemas.openxmlformats.org/drawingml/2006/main"/>
           <a:p xmlns:a="http://schemas.openxmlformats.org/drawingml/2006/main">
             <a:pPr algn="l">
-              <a:defRPr sz="1500" b="0">
+              <a:defRPr sz="1725" b="0">
                 <a:solidFill>
                   <a:srgbClr val="17253A"/>
                 </a:solidFill>
@@ -8393,7 +8395,7 @@
               </a:defRPr>
             </a:pPr>
             <a:r>
-              <a:rPr sz="1500" b="0">
+              <a:rPr sz="1725" b="0">
                 <a:solidFill>
                   <a:srgbClr val="17253A"/>
                 </a:solidFill>
@@ -8401,7 +8403,7 @@
                 <a:ea typeface="Arial"/>
                 <a:cs typeface="Arial"/>
               </a:rPr>
-              <a:t>Identify the structure: Retrieve the relevant fact, representation or formula.</a:t>
+              <a:t>12.5% of £640 = 1/8 of £640</a:t>
             </a:r>
           </a:p>
         </p:txBody>
@@ -8411,28 +8413,30 @@
           <p:cNvPr id="14" name="">
             <a:extLst xmlns:a="http://schemas.openxmlformats.org/drawingml/2006/main">
               <a:ext uri="{FF2B5EF4-FFF2-40B4-BE49-F238E27FC236}">
-                <a16:creationId xmlns:a16="http://schemas.microsoft.com/office/drawing/2014/main" id="{80F34713-2A43-425C-BE4B-B882A280E7F5}"/>
-              </a:ext>
-            </a:extLst>
-          </p:cNvPr>
-          <p:cNvSpPr>
-            <a:spLocks xmlns:a="http://schemas.openxmlformats.org/drawingml/2006/main" noGrp="1"/>
-          </p:cNvSpPr>
-          <p:nvPr/>
-        </p:nvSpPr>
-        <p:spPr>
-          <a:xfrm xmlns:a="http://schemas.openxmlformats.org/drawingml/2006/main">
-            <a:off x="1000125" y="2990850"/>
-            <a:ext cx="476250" cy="476250"/>
-          </a:xfrm>
-          <a:prstGeom xmlns:a="http://schemas.openxmlformats.org/drawingml/2006/main" prst="ellipse">
+                <a16:creationId xmlns:a16="http://schemas.microsoft.com/office/drawing/2014/main" id="{90B725DC-6680-4530-8267-A30809387DBF}"/>
+              </a:ext>
+            </a:extLst>
+          </p:cNvPr>
+          <p:cNvSpPr>
+            <a:spLocks xmlns:a="http://schemas.openxmlformats.org/drawingml/2006/main" noGrp="1"/>
+          </p:cNvSpPr>
+          <p:nvPr/>
+        </p:nvSpPr>
+        <p:spPr>
+          <a:xfrm xmlns:a="http://schemas.openxmlformats.org/drawingml/2006/main">
+            <a:off x="1714500" y="2943225"/>
+            <a:ext cx="9334500" cy="9525"/>
+          </a:xfrm>
+          <a:prstGeom xmlns:a="http://schemas.openxmlformats.org/drawingml/2006/main" prst="rect">
             <a:avLst/>
           </a:prstGeom>
           <a:solidFill xmlns:a="http://schemas.openxmlformats.org/drawingml/2006/main">
-            <a:srgbClr val="2C6E73"/>
+            <a:srgbClr val="D9E0E6"/>
           </a:solidFill>
           <a:ln xmlns:a="http://schemas.openxmlformats.org/drawingml/2006/main" w="0">
-            <a:noFill/>
+            <a:solidFill>
+              <a:srgbClr val="D9E0E6"/>
+            </a:solidFill>
           </a:ln>
         </p:spPr>
       </p:sp>
@@ -8441,19 +8445,19 @@
           <p:cNvPr id="15" name="">
             <a:extLst xmlns:a="http://schemas.openxmlformats.org/drawingml/2006/main">
               <a:ext uri="{FF2B5EF4-FFF2-40B4-BE49-F238E27FC236}">
-                <a16:creationId xmlns:a16="http://schemas.microsoft.com/office/drawing/2014/main" id="{042385DC-8132-4CF4-A3E6-B9E8F75ECC68}"/>
-              </a:ext>
-            </a:extLst>
-          </p:cNvPr>
-          <p:cNvSpPr>
-            <a:spLocks xmlns:a="http://schemas.openxmlformats.org/drawingml/2006/main" noGrp="1"/>
-          </p:cNvSpPr>
-          <p:nvPr/>
-        </p:nvSpPr>
-        <p:spPr>
-          <a:xfrm xmlns:a="http://schemas.openxmlformats.org/drawingml/2006/main">
-            <a:off x="1000125" y="3019425"/>
-            <a:ext cx="476250" cy="419100"/>
+                <a16:creationId xmlns:a16="http://schemas.microsoft.com/office/drawing/2014/main" id="{962B63D3-C560-4CA5-A88B-0919C6452958}"/>
+              </a:ext>
+            </a:extLst>
+          </p:cNvPr>
+          <p:cNvSpPr>
+            <a:spLocks xmlns:a="http://schemas.openxmlformats.org/drawingml/2006/main" noGrp="1"/>
+          </p:cNvSpPr>
+          <p:nvPr/>
+        </p:nvSpPr>
+        <p:spPr>
+          <a:xfrm xmlns:a="http://schemas.openxmlformats.org/drawingml/2006/main">
+            <a:off x="1162050" y="3076575"/>
+            <a:ext cx="400050" cy="400050"/>
           </a:xfrm>
           <a:prstGeom xmlns:a="http://schemas.openxmlformats.org/drawingml/2006/main" prst="rect">
             <a:avLst/>
@@ -8470,9 +8474,9 @@
           <a:lstStyle xmlns:a="http://schemas.openxmlformats.org/drawingml/2006/main"/>
           <a:p xmlns:a="http://schemas.openxmlformats.org/drawingml/2006/main">
             <a:pPr algn="ctr">
-              <a:defRPr sz="1350" b="1">
-                <a:solidFill>
-                  <a:srgbClr val="FFFFFF"/>
+              <a:defRPr sz="1125" b="1">
+                <a:solidFill>
+                  <a:srgbClr val="2C6E73"/>
                 </a:solidFill>
                 <a:latin typeface="Arial"/>
                 <a:ea typeface="Arial"/>
@@ -8480,9 +8484,9 @@
               </a:defRPr>
             </a:pPr>
             <a:r>
-              <a:rPr sz="1350" b="1">
-                <a:solidFill>
-                  <a:srgbClr val="FFFFFF"/>
+              <a:rPr sz="1125" b="1">
+                <a:solidFill>
+                  <a:srgbClr val="2C6E73"/>
                 </a:solidFill>
                 <a:latin typeface="Arial"/>
                 <a:ea typeface="Arial"/>
@@ -8498,19 +8502,19 @@
           <p:cNvPr id="16" name="">
             <a:extLst xmlns:a="http://schemas.openxmlformats.org/drawingml/2006/main">
               <a:ext uri="{FF2B5EF4-FFF2-40B4-BE49-F238E27FC236}">
-                <a16:creationId xmlns:a16="http://schemas.microsoft.com/office/drawing/2014/main" id="{F796EB27-3647-4AF9-AFFB-50D8BAB997D2}"/>
-              </a:ext>
-            </a:extLst>
-          </p:cNvPr>
-          <p:cNvSpPr>
-            <a:spLocks xmlns:a="http://schemas.openxmlformats.org/drawingml/2006/main" noGrp="1"/>
-          </p:cNvSpPr>
-          <p:nvPr/>
-        </p:nvSpPr>
-        <p:spPr>
-          <a:xfrm xmlns:a="http://schemas.openxmlformats.org/drawingml/2006/main">
-            <a:off x="1714500" y="2924175"/>
-            <a:ext cx="9429750" cy="609600"/>
+                <a16:creationId xmlns:a16="http://schemas.microsoft.com/office/drawing/2014/main" id="{FB2CD785-49EA-4857-A0F3-762ACA4E797E}"/>
+              </a:ext>
+            </a:extLst>
+          </p:cNvPr>
+          <p:cNvSpPr>
+            <a:spLocks xmlns:a="http://schemas.openxmlformats.org/drawingml/2006/main" noGrp="1"/>
+          </p:cNvSpPr>
+          <p:nvPr/>
+        </p:nvSpPr>
+        <p:spPr>
+          <a:xfrm xmlns:a="http://schemas.openxmlformats.org/drawingml/2006/main">
+            <a:off x="1714500" y="2990850"/>
+            <a:ext cx="9525000" cy="809625"/>
           </a:xfrm>
           <a:prstGeom xmlns:a="http://schemas.openxmlformats.org/drawingml/2006/main" prst="rect">
             <a:avLst/>
@@ -8527,7 +8531,7 @@
           <a:lstStyle xmlns:a="http://schemas.openxmlformats.org/drawingml/2006/main"/>
           <a:p xmlns:a="http://schemas.openxmlformats.org/drawingml/2006/main">
             <a:pPr algn="l">
-              <a:defRPr sz="1500" b="0">
+              <a:defRPr sz="1725" b="0">
                 <a:solidFill>
                   <a:srgbClr val="17253A"/>
                 </a:solidFill>
@@ -8537,7 +8541,7 @@
               </a:defRPr>
             </a:pPr>
             <a:r>
-              <a:rPr sz="1500" b="0">
+              <a:rPr sz="1725" b="0">
                 <a:solidFill>
                   <a:srgbClr val="17253A"/>
                 </a:solidFill>
@@ -8545,7 +8549,7 @@
                 <a:ea typeface="Arial"/>
                 <a:cs typeface="Arial"/>
               </a:rPr>
-              <a:t>Set up the method: Show a complete method and explain the mathematical decision.</a:t>
+              <a:t>£640 ÷ 8 = £80</a:t>
             </a:r>
           </a:p>
         </p:txBody>
@@ -8555,28 +8559,30 @@
           <p:cNvPr id="17" name="">
             <a:extLst xmlns:a="http://schemas.openxmlformats.org/drawingml/2006/main">
               <a:ext uri="{FF2B5EF4-FFF2-40B4-BE49-F238E27FC236}">
-                <a16:creationId xmlns:a16="http://schemas.microsoft.com/office/drawing/2014/main" id="{862D8108-0830-415D-A20A-AE501319FDA1}"/>
-              </a:ext>
-            </a:extLst>
-          </p:cNvPr>
-          <p:cNvSpPr>
-            <a:spLocks xmlns:a="http://schemas.openxmlformats.org/drawingml/2006/main" noGrp="1"/>
-          </p:cNvSpPr>
-          <p:nvPr/>
-        </p:nvSpPr>
-        <p:spPr>
-          <a:xfrm xmlns:a="http://schemas.openxmlformats.org/drawingml/2006/main">
-            <a:off x="1000125" y="3733800"/>
-            <a:ext cx="476250" cy="476250"/>
-          </a:xfrm>
-          <a:prstGeom xmlns:a="http://schemas.openxmlformats.org/drawingml/2006/main" prst="ellipse">
+                <a16:creationId xmlns:a16="http://schemas.microsoft.com/office/drawing/2014/main" id="{3D58D9C8-D3F4-4BE7-924B-1FB0AA683CBD}"/>
+              </a:ext>
+            </a:extLst>
+          </p:cNvPr>
+          <p:cNvSpPr>
+            <a:spLocks xmlns:a="http://schemas.openxmlformats.org/drawingml/2006/main" noGrp="1"/>
+          </p:cNvSpPr>
+          <p:nvPr/>
+        </p:nvSpPr>
+        <p:spPr>
+          <a:xfrm xmlns:a="http://schemas.openxmlformats.org/drawingml/2006/main">
+            <a:off x="1714500" y="3819525"/>
+            <a:ext cx="9334500" cy="9525"/>
+          </a:xfrm>
+          <a:prstGeom xmlns:a="http://schemas.openxmlformats.org/drawingml/2006/main" prst="rect">
             <a:avLst/>
           </a:prstGeom>
           <a:solidFill xmlns:a="http://schemas.openxmlformats.org/drawingml/2006/main">
-            <a:srgbClr val="2C6E73"/>
+            <a:srgbClr val="D9E0E6"/>
           </a:solidFill>
           <a:ln xmlns:a="http://schemas.openxmlformats.org/drawingml/2006/main" w="0">
-            <a:noFill/>
+            <a:solidFill>
+              <a:srgbClr val="D9E0E6"/>
+            </a:solidFill>
           </a:ln>
         </p:spPr>
       </p:sp>
@@ -8585,19 +8591,19 @@
           <p:cNvPr id="18" name="">
             <a:extLst xmlns:a="http://schemas.openxmlformats.org/drawingml/2006/main">
               <a:ext uri="{FF2B5EF4-FFF2-40B4-BE49-F238E27FC236}">
-                <a16:creationId xmlns:a16="http://schemas.microsoft.com/office/drawing/2014/main" id="{E08ACE0E-3B7A-4E56-800E-95B2B48F368C}"/>
-              </a:ext>
-            </a:extLst>
-          </p:cNvPr>
-          <p:cNvSpPr>
-            <a:spLocks xmlns:a="http://schemas.openxmlformats.org/drawingml/2006/main" noGrp="1"/>
-          </p:cNvSpPr>
-          <p:nvPr/>
-        </p:nvSpPr>
-        <p:spPr>
-          <a:xfrm xmlns:a="http://schemas.openxmlformats.org/drawingml/2006/main">
-            <a:off x="1000125" y="3762375"/>
-            <a:ext cx="476250" cy="419100"/>
+                <a16:creationId xmlns:a16="http://schemas.microsoft.com/office/drawing/2014/main" id="{1C1CDC1D-0A00-42FC-8F12-63E73A979E92}"/>
+              </a:ext>
+            </a:extLst>
+          </p:cNvPr>
+          <p:cNvSpPr>
+            <a:spLocks xmlns:a="http://schemas.openxmlformats.org/drawingml/2006/main" noGrp="1"/>
+          </p:cNvSpPr>
+          <p:nvPr/>
+        </p:nvSpPr>
+        <p:spPr>
+          <a:xfrm xmlns:a="http://schemas.openxmlformats.org/drawingml/2006/main">
+            <a:off x="1162050" y="3952875"/>
+            <a:ext cx="400050" cy="400050"/>
           </a:xfrm>
           <a:prstGeom xmlns:a="http://schemas.openxmlformats.org/drawingml/2006/main" prst="rect">
             <a:avLst/>
@@ -8614,9 +8620,9 @@
           <a:lstStyle xmlns:a="http://schemas.openxmlformats.org/drawingml/2006/main"/>
           <a:p xmlns:a="http://schemas.openxmlformats.org/drawingml/2006/main">
             <a:pPr algn="ctr">
-              <a:defRPr sz="1350" b="1">
-                <a:solidFill>
-                  <a:srgbClr val="FFFFFF"/>
+              <a:defRPr sz="1125" b="1">
+                <a:solidFill>
+                  <a:srgbClr val="2C6E73"/>
                 </a:solidFill>
                 <a:latin typeface="Arial"/>
                 <a:ea typeface="Arial"/>
@@ -8624,9 +8630,9 @@
               </a:defRPr>
             </a:pPr>
             <a:r>
-              <a:rPr sz="1350" b="1">
-                <a:solidFill>
-                  <a:srgbClr val="FFFFFF"/>
+              <a:rPr sz="1125" b="1">
+                <a:solidFill>
+                  <a:srgbClr val="2C6E73"/>
                 </a:solidFill>
                 <a:latin typeface="Arial"/>
                 <a:ea typeface="Arial"/>
@@ -8642,19 +8648,19 @@
           <p:cNvPr id="19" name="">
             <a:extLst xmlns:a="http://schemas.openxmlformats.org/drawingml/2006/main">
               <a:ext uri="{FF2B5EF4-FFF2-40B4-BE49-F238E27FC236}">
-                <a16:creationId xmlns:a16="http://schemas.microsoft.com/office/drawing/2014/main" id="{B463BCB0-5E89-496A-82A9-E4B9808BE399}"/>
-              </a:ext>
-            </a:extLst>
-          </p:cNvPr>
-          <p:cNvSpPr>
-            <a:spLocks xmlns:a="http://schemas.openxmlformats.org/drawingml/2006/main" noGrp="1"/>
-          </p:cNvSpPr>
-          <p:nvPr/>
-        </p:nvSpPr>
-        <p:spPr>
-          <a:xfrm xmlns:a="http://schemas.openxmlformats.org/drawingml/2006/main">
-            <a:off x="1714500" y="3667125"/>
-            <a:ext cx="9429750" cy="609600"/>
+                <a16:creationId xmlns:a16="http://schemas.microsoft.com/office/drawing/2014/main" id="{9911E1C8-7C26-4AC4-AF59-B3179A523162}"/>
+              </a:ext>
+            </a:extLst>
+          </p:cNvPr>
+          <p:cNvSpPr>
+            <a:spLocks xmlns:a="http://schemas.openxmlformats.org/drawingml/2006/main" noGrp="1"/>
+          </p:cNvSpPr>
+          <p:nvPr/>
+        </p:nvSpPr>
+        <p:spPr>
+          <a:xfrm xmlns:a="http://schemas.openxmlformats.org/drawingml/2006/main">
+            <a:off x="1714500" y="3867150"/>
+            <a:ext cx="9525000" cy="809625"/>
           </a:xfrm>
           <a:prstGeom xmlns:a="http://schemas.openxmlformats.org/drawingml/2006/main" prst="rect">
             <a:avLst/>
@@ -8671,7 +8677,7 @@
           <a:lstStyle xmlns:a="http://schemas.openxmlformats.org/drawingml/2006/main"/>
           <a:p xmlns:a="http://schemas.openxmlformats.org/drawingml/2006/main">
             <a:pPr algn="l">
-              <a:defRPr sz="1500" b="0">
+              <a:defRPr sz="1725" b="0">
                 <a:solidFill>
                   <a:srgbClr val="17253A"/>
                 </a:solidFill>
@@ -8681,7 +8687,7 @@
               </a:defRPr>
             </a:pPr>
             <a:r>
-              <a:rPr sz="1500" b="0">
+              <a:rPr sz="1725" b="0">
                 <a:solidFill>
                   <a:srgbClr val="17253A"/>
                 </a:solidFill>
@@ -8689,7 +8695,7 @@
                 <a:ea typeface="Arial"/>
                 <a:cs typeface="Arial"/>
               </a:rPr>
-              <a:t>Complete the calculation: £560.</a:t>
+              <a:t>£640 - £80</a:t>
             </a:r>
           </a:p>
         </p:txBody>
@@ -8699,28 +8705,30 @@
           <p:cNvPr id="20" name="">
             <a:extLst xmlns:a="http://schemas.openxmlformats.org/drawingml/2006/main">
               <a:ext uri="{FF2B5EF4-FFF2-40B4-BE49-F238E27FC236}">
-                <a16:creationId xmlns:a16="http://schemas.microsoft.com/office/drawing/2014/main" id="{DE02B873-66E5-4E60-B337-42D99744D554}"/>
-              </a:ext>
-            </a:extLst>
-          </p:cNvPr>
-          <p:cNvSpPr>
-            <a:spLocks xmlns:a="http://schemas.openxmlformats.org/drawingml/2006/main" noGrp="1"/>
-          </p:cNvSpPr>
-          <p:nvPr/>
-        </p:nvSpPr>
-        <p:spPr>
-          <a:xfrm xmlns:a="http://schemas.openxmlformats.org/drawingml/2006/main">
-            <a:off x="1000125" y="4476750"/>
-            <a:ext cx="476250" cy="476250"/>
-          </a:xfrm>
-          <a:prstGeom xmlns:a="http://schemas.openxmlformats.org/drawingml/2006/main" prst="ellipse">
+                <a16:creationId xmlns:a16="http://schemas.microsoft.com/office/drawing/2014/main" id="{969FB14E-4987-4CBF-8057-70E3CEB538AE}"/>
+              </a:ext>
+            </a:extLst>
+          </p:cNvPr>
+          <p:cNvSpPr>
+            <a:spLocks xmlns:a="http://schemas.openxmlformats.org/drawingml/2006/main" noGrp="1"/>
+          </p:cNvSpPr>
+          <p:nvPr/>
+        </p:nvSpPr>
+        <p:spPr>
+          <a:xfrm xmlns:a="http://schemas.openxmlformats.org/drawingml/2006/main">
+            <a:off x="1714500" y="4695825"/>
+            <a:ext cx="9334500" cy="9525"/>
+          </a:xfrm>
+          <a:prstGeom xmlns:a="http://schemas.openxmlformats.org/drawingml/2006/main" prst="rect">
             <a:avLst/>
           </a:prstGeom>
           <a:solidFill xmlns:a="http://schemas.openxmlformats.org/drawingml/2006/main">
-            <a:srgbClr val="2C6E73"/>
+            <a:srgbClr val="D9E0E6"/>
           </a:solidFill>
           <a:ln xmlns:a="http://schemas.openxmlformats.org/drawingml/2006/main" w="0">
-            <a:noFill/>
+            <a:solidFill>
+              <a:srgbClr val="D9E0E6"/>
+            </a:solidFill>
           </a:ln>
         </p:spPr>
       </p:sp>
@@ -8729,19 +8737,19 @@
           <p:cNvPr id="21" name="">
             <a:extLst xmlns:a="http://schemas.openxmlformats.org/drawingml/2006/main">
               <a:ext uri="{FF2B5EF4-FFF2-40B4-BE49-F238E27FC236}">
-                <a16:creationId xmlns:a16="http://schemas.microsoft.com/office/drawing/2014/main" id="{963CEC3A-6B6B-40F1-8DA6-E264017042D2}"/>
-              </a:ext>
-            </a:extLst>
-          </p:cNvPr>
-          <p:cNvSpPr>
-            <a:spLocks xmlns:a="http://schemas.openxmlformats.org/drawingml/2006/main" noGrp="1"/>
-          </p:cNvSpPr>
-          <p:nvPr/>
-        </p:nvSpPr>
-        <p:spPr>
-          <a:xfrm xmlns:a="http://schemas.openxmlformats.org/drawingml/2006/main">
-            <a:off x="1000125" y="4505325"/>
-            <a:ext cx="476250" cy="419100"/>
+                <a16:creationId xmlns:a16="http://schemas.microsoft.com/office/drawing/2014/main" id="{650239CC-E66F-48ED-966D-88AFE2BF4D60}"/>
+              </a:ext>
+            </a:extLst>
+          </p:cNvPr>
+          <p:cNvSpPr>
+            <a:spLocks xmlns:a="http://schemas.openxmlformats.org/drawingml/2006/main" noGrp="1"/>
+          </p:cNvSpPr>
+          <p:nvPr/>
+        </p:nvSpPr>
+        <p:spPr>
+          <a:xfrm xmlns:a="http://schemas.openxmlformats.org/drawingml/2006/main">
+            <a:off x="1162050" y="4829175"/>
+            <a:ext cx="400050" cy="400050"/>
           </a:xfrm>
           <a:prstGeom xmlns:a="http://schemas.openxmlformats.org/drawingml/2006/main" prst="rect">
             <a:avLst/>
@@ -8758,9 +8766,9 @@
           <a:lstStyle xmlns:a="http://schemas.openxmlformats.org/drawingml/2006/main"/>
           <a:p xmlns:a="http://schemas.openxmlformats.org/drawingml/2006/main">
             <a:pPr algn="ctr">
-              <a:defRPr sz="1350" b="1">
-                <a:solidFill>
-                  <a:srgbClr val="FFFFFF"/>
+              <a:defRPr sz="1125" b="1">
+                <a:solidFill>
+                  <a:srgbClr val="2F785D"/>
                 </a:solidFill>
                 <a:latin typeface="Arial"/>
                 <a:ea typeface="Arial"/>
@@ -8768,9 +8776,9 @@
               </a:defRPr>
             </a:pPr>
             <a:r>
-              <a:rPr sz="1350" b="1">
-                <a:solidFill>
-                  <a:srgbClr val="FFFFFF"/>
+              <a:rPr sz="1125" b="1">
+                <a:solidFill>
+                  <a:srgbClr val="2F785D"/>
                 </a:solidFill>
                 <a:latin typeface="Arial"/>
                 <a:ea typeface="Arial"/>
@@ -8786,19 +8794,19 @@
           <p:cNvPr id="22" name="">
             <a:extLst xmlns:a="http://schemas.openxmlformats.org/drawingml/2006/main">
               <a:ext uri="{FF2B5EF4-FFF2-40B4-BE49-F238E27FC236}">
-                <a16:creationId xmlns:a16="http://schemas.microsoft.com/office/drawing/2014/main" id="{184B9091-84AA-4278-938F-44871A09A7C2}"/>
-              </a:ext>
-            </a:extLst>
-          </p:cNvPr>
-          <p:cNvSpPr>
-            <a:spLocks xmlns:a="http://schemas.openxmlformats.org/drawingml/2006/main" noGrp="1"/>
-          </p:cNvSpPr>
-          <p:nvPr/>
-        </p:nvSpPr>
-        <p:spPr>
-          <a:xfrm xmlns:a="http://schemas.openxmlformats.org/drawingml/2006/main">
-            <a:off x="1714500" y="4410075"/>
-            <a:ext cx="9429750" cy="609600"/>
+                <a16:creationId xmlns:a16="http://schemas.microsoft.com/office/drawing/2014/main" id="{48728375-7E6B-4521-A569-9CEA0FE762D1}"/>
+              </a:ext>
+            </a:extLst>
+          </p:cNvPr>
+          <p:cNvSpPr>
+            <a:spLocks xmlns:a="http://schemas.openxmlformats.org/drawingml/2006/main" noGrp="1"/>
+          </p:cNvSpPr>
+          <p:nvPr/>
+        </p:nvSpPr>
+        <p:spPr>
+          <a:xfrm xmlns:a="http://schemas.openxmlformats.org/drawingml/2006/main">
+            <a:off x="1714500" y="4743450"/>
+            <a:ext cx="9525000" cy="809625"/>
           </a:xfrm>
           <a:prstGeom xmlns:a="http://schemas.openxmlformats.org/drawingml/2006/main" prst="rect">
             <a:avLst/>
@@ -8815,7 +8823,7 @@
           <a:lstStyle xmlns:a="http://schemas.openxmlformats.org/drawingml/2006/main"/>
           <a:p xmlns:a="http://schemas.openxmlformats.org/drawingml/2006/main">
             <a:pPr algn="l">
-              <a:defRPr sz="1500" b="1">
+              <a:defRPr sz="1725" b="1">
                 <a:solidFill>
                   <a:srgbClr val="2F785D"/>
                 </a:solidFill>
@@ -8825,7 +8833,7 @@
               </a:defRPr>
             </a:pPr>
             <a:r>
-              <a:rPr sz="1500" b="1">
+              <a:rPr sz="1725" b="1">
                 <a:solidFill>
                   <a:srgbClr val="2F785D"/>
                 </a:solidFill>
@@ -8833,7 +8841,7 @@
                 <a:ea typeface="Arial"/>
                 <a:cs typeface="Arial"/>
               </a:rPr>
-              <a:t>Check the result: Check the result and record a precise transition target.</a:t>
+              <a:t>Sale price = £560</a:t>
             </a:r>
           </a:p>
         </p:txBody>
@@ -8841,7 +8849,7 @@
     </p:spTree>
     <p:extLst>
       <p:ext uri="{BB962C8B-B14F-4D97-AF65-F5344CB8AC3E}">
-        <p14:creationId xmlns:p14="http://schemas.microsoft.com/office/powerpoint/2010/main" val="2102265012"/>
+        <p14:creationId xmlns:p14="http://schemas.microsoft.com/office/powerpoint/2010/main" val="188383166"/>
       </p:ext>
     </p:extLst>
   </p:cSld>
@@ -9134,7 +9142,7 @@
           <p:cNvPr id="15" name="">
             <a:extLst xmlns:a="http://schemas.openxmlformats.org/drawingml/2006/main">
               <a:ext uri="{FF2B5EF4-FFF2-40B4-BE49-F238E27FC236}">
-                <a16:creationId xmlns:a16="http://schemas.microsoft.com/office/drawing/2014/main" id="{D37340AF-3495-49A2-9BEA-86EEE4490531}"/>
+                <a16:creationId xmlns:a16="http://schemas.microsoft.com/office/drawing/2014/main" id="{6BC40453-2360-4F6C-AD9E-A3B71FE547AA}"/>
               </a:ext>
             </a:extLst>
           </p:cNvPr>
@@ -9166,7 +9174,7 @@
           <p:cNvPr id="2" name="">
             <a:extLst xmlns:a="http://schemas.openxmlformats.org/drawingml/2006/main">
               <a:ext uri="{FF2B5EF4-FFF2-40B4-BE49-F238E27FC236}">
-                <a16:creationId xmlns:a16="http://schemas.microsoft.com/office/drawing/2014/main" id="{F908CD38-BDC6-434D-8BC7-618D9F23B836}"/>
+                <a16:creationId xmlns:a16="http://schemas.microsoft.com/office/drawing/2014/main" id="{0EACBDFB-5901-4DF5-9C34-CE0A55E4407F}"/>
               </a:ext>
             </a:extLst>
           </p:cNvPr>
@@ -9223,7 +9231,7 @@
           <p:cNvPr id="3" name="">
             <a:extLst xmlns:a="http://schemas.openxmlformats.org/drawingml/2006/main">
               <a:ext uri="{FF2B5EF4-FFF2-40B4-BE49-F238E27FC236}">
-                <a16:creationId xmlns:a16="http://schemas.microsoft.com/office/drawing/2014/main" id="{B70EDA1A-F06D-48E1-B00F-2B2521DD1CF0}"/>
+                <a16:creationId xmlns:a16="http://schemas.microsoft.com/office/drawing/2014/main" id="{4C95332B-EFC0-4710-8CD9-239DAB48D035}"/>
               </a:ext>
             </a:extLst>
           </p:cNvPr>
@@ -9255,7 +9263,7 @@
           <p:cNvPr id="4" name="">
             <a:extLst xmlns:a="http://schemas.openxmlformats.org/drawingml/2006/main">
               <a:ext uri="{FF2B5EF4-FFF2-40B4-BE49-F238E27FC236}">
-                <a16:creationId xmlns:a16="http://schemas.microsoft.com/office/drawing/2014/main" id="{19CF8BE2-EFB6-4322-B2E8-1B5526665B9A}"/>
+                <a16:creationId xmlns:a16="http://schemas.microsoft.com/office/drawing/2014/main" id="{79804EEB-F649-4299-ADC5-DA5689CD3F5B}"/>
               </a:ext>
             </a:extLst>
           </p:cNvPr>
@@ -9312,7 +9320,7 @@
           <p:cNvPr id="5" name="">
             <a:extLst xmlns:a="http://schemas.openxmlformats.org/drawingml/2006/main">
               <a:ext uri="{FF2B5EF4-FFF2-40B4-BE49-F238E27FC236}">
-                <a16:creationId xmlns:a16="http://schemas.microsoft.com/office/drawing/2014/main" id="{3D9FED4E-87F3-417E-A011-F3A214C75493}"/>
+                <a16:creationId xmlns:a16="http://schemas.microsoft.com/office/drawing/2014/main" id="{98E54701-26C8-4677-B9FB-ED5B7A132F37}"/>
               </a:ext>
             </a:extLst>
           </p:cNvPr>
@@ -9369,7 +9377,7 @@
           <p:cNvPr id="6" name="">
             <a:extLst xmlns:a="http://schemas.openxmlformats.org/drawingml/2006/main">
               <a:ext uri="{FF2B5EF4-FFF2-40B4-BE49-F238E27FC236}">
-                <a16:creationId xmlns:a16="http://schemas.microsoft.com/office/drawing/2014/main" id="{15C064A3-244F-4259-94BC-7B96C06F6B4B}"/>
+                <a16:creationId xmlns:a16="http://schemas.microsoft.com/office/drawing/2014/main" id="{52B9E7C9-B67C-4D3C-9CEB-732F267D4ECB}"/>
               </a:ext>
             </a:extLst>
           </p:cNvPr>
@@ -9426,7 +9434,7 @@
           <p:cNvPr id="7" name="">
             <a:extLst xmlns:a="http://schemas.openxmlformats.org/drawingml/2006/main">
               <a:ext uri="{FF2B5EF4-FFF2-40B4-BE49-F238E27FC236}">
-                <a16:creationId xmlns:a16="http://schemas.microsoft.com/office/drawing/2014/main" id="{0E37A544-E0EE-42F8-B73E-317A32B761E4}"/>
+                <a16:creationId xmlns:a16="http://schemas.microsoft.com/office/drawing/2014/main" id="{B455C67D-5769-4E9D-BBD0-A0B9FBA930C7}"/>
               </a:ext>
             </a:extLst>
           </p:cNvPr>
@@ -9458,7 +9466,7 @@
           <p:cNvPr id="8" name="">
             <a:extLst xmlns:a="http://schemas.openxmlformats.org/drawingml/2006/main">
               <a:ext uri="{FF2B5EF4-FFF2-40B4-BE49-F238E27FC236}">
-                <a16:creationId xmlns:a16="http://schemas.microsoft.com/office/drawing/2014/main" id="{4F22CFBD-2A90-4FDA-A90D-2E5E3EBC19FC}"/>
+                <a16:creationId xmlns:a16="http://schemas.microsoft.com/office/drawing/2014/main" id="{0DAA10A7-7B3C-4B59-A886-CAD825B41368}"/>
               </a:ext>
             </a:extLst>
           </p:cNvPr>
@@ -9515,7 +9523,7 @@
           <p:cNvPr id="9" name="">
             <a:extLst xmlns:a="http://schemas.openxmlformats.org/drawingml/2006/main">
               <a:ext uri="{FF2B5EF4-FFF2-40B4-BE49-F238E27FC236}">
-                <a16:creationId xmlns:a16="http://schemas.microsoft.com/office/drawing/2014/main" id="{ABDFEB74-DCF8-48B0-844D-5D4409C29D00}"/>
+                <a16:creationId xmlns:a16="http://schemas.microsoft.com/office/drawing/2014/main" id="{F6AEC1F4-477D-4A3E-8D5A-6EED64F6FE94}"/>
               </a:ext>
             </a:extLst>
           </p:cNvPr>
@@ -9572,7 +9580,7 @@
           <p:cNvPr id="10" name="">
             <a:extLst xmlns:a="http://schemas.openxmlformats.org/drawingml/2006/main">
               <a:ext uri="{FF2B5EF4-FFF2-40B4-BE49-F238E27FC236}">
-                <a16:creationId xmlns:a16="http://schemas.microsoft.com/office/drawing/2014/main" id="{A5A91048-32FD-4125-B618-EC2852B3DBDF}"/>
+                <a16:creationId xmlns:a16="http://schemas.microsoft.com/office/drawing/2014/main" id="{A42D3AA6-3D13-43B3-8D4A-827972E6E072}"/>
               </a:ext>
             </a:extLst>
           </p:cNvPr>
@@ -9629,7 +9637,7 @@
           <p:cNvPr id="11" name="">
             <a:extLst xmlns:a="http://schemas.openxmlformats.org/drawingml/2006/main">
               <a:ext uri="{FF2B5EF4-FFF2-40B4-BE49-F238E27FC236}">
-                <a16:creationId xmlns:a16="http://schemas.microsoft.com/office/drawing/2014/main" id="{2A81EA76-63A4-4150-AFC9-FEEFA7FDA8A9}"/>
+                <a16:creationId xmlns:a16="http://schemas.microsoft.com/office/drawing/2014/main" id="{95896949-052F-4FC8-A0BA-3B3A22950F29}"/>
               </a:ext>
             </a:extLst>
           </p:cNvPr>
@@ -9686,7 +9694,7 @@
           <p:cNvPr id="12" name="">
             <a:extLst xmlns:a="http://schemas.openxmlformats.org/drawingml/2006/main">
               <a:ext uri="{FF2B5EF4-FFF2-40B4-BE49-F238E27FC236}">
-                <a16:creationId xmlns:a16="http://schemas.microsoft.com/office/drawing/2014/main" id="{89A80AE7-9B5E-4359-9413-C2ADC009BBCE}"/>
+                <a16:creationId xmlns:a16="http://schemas.microsoft.com/office/drawing/2014/main" id="{FAE436E4-51EA-4221-B968-5F1E2B6CC47D}"/>
               </a:ext>
             </a:extLst>
           </p:cNvPr>
@@ -9718,7 +9726,7 @@
           <p:cNvPr id="13" name="">
             <a:extLst xmlns:a="http://schemas.openxmlformats.org/drawingml/2006/main">
               <a:ext uri="{FF2B5EF4-FFF2-40B4-BE49-F238E27FC236}">
-                <a16:creationId xmlns:a16="http://schemas.microsoft.com/office/drawing/2014/main" id="{B25EB0AF-499D-4778-970F-07779F499668}"/>
+                <a16:creationId xmlns:a16="http://schemas.microsoft.com/office/drawing/2014/main" id="{CADC1A29-BC7E-4142-9B83-9F8652F1FD57}"/>
               </a:ext>
             </a:extLst>
           </p:cNvPr>
@@ -9775,7 +9783,7 @@
           <p:cNvPr id="14" name="">
             <a:extLst xmlns:a="http://schemas.openxmlformats.org/drawingml/2006/main">
               <a:ext uri="{FF2B5EF4-FFF2-40B4-BE49-F238E27FC236}">
-                <a16:creationId xmlns:a16="http://schemas.microsoft.com/office/drawing/2014/main" id="{68E793C3-1C63-44FF-955B-BB3D316B2845}"/>
+                <a16:creationId xmlns:a16="http://schemas.microsoft.com/office/drawing/2014/main" id="{1FD03FCF-DC58-451F-9738-6AC4F018ADB8}"/>
               </a:ext>
             </a:extLst>
           </p:cNvPr>
@@ -9830,7 +9838,7 @@
     </p:spTree>
     <p:extLst>
       <p:ext uri="{BB962C8B-B14F-4D97-AF65-F5344CB8AC3E}">
-        <p14:creationId xmlns:p14="http://schemas.microsoft.com/office/powerpoint/2010/main" val="1208882564"/>
+        <p14:creationId xmlns:p14="http://schemas.microsoft.com/office/powerpoint/2010/main" val="1576334464"/>
       </p:ext>
     </p:extLst>
   </p:cSld>
@@ -10031,7 +10039,7 @@
           <p:cNvPr id="16" name="">
             <a:extLst xmlns:a="http://schemas.openxmlformats.org/drawingml/2006/main">
               <a:ext uri="{FF2B5EF4-FFF2-40B4-BE49-F238E27FC236}">
-                <a16:creationId xmlns:a16="http://schemas.microsoft.com/office/drawing/2014/main" id="{C6CBC724-BCC5-4D94-B9FD-19672A68E03B}"/>
+                <a16:creationId xmlns:a16="http://schemas.microsoft.com/office/drawing/2014/main" id="{49E18B0B-21BD-4E09-9CB0-389B29504DB0}"/>
               </a:ext>
             </a:extLst>
           </p:cNvPr>
@@ -10063,7 +10071,7 @@
           <p:cNvPr id="2" name="">
             <a:extLst xmlns:a="http://schemas.openxmlformats.org/drawingml/2006/main">
               <a:ext uri="{FF2B5EF4-FFF2-40B4-BE49-F238E27FC236}">
-                <a16:creationId xmlns:a16="http://schemas.microsoft.com/office/drawing/2014/main" id="{0A9E5174-7185-4BB9-AF91-22B697723A36}"/>
+                <a16:creationId xmlns:a16="http://schemas.microsoft.com/office/drawing/2014/main" id="{8B956889-A111-48F0-A3E5-DD83F46D4FE7}"/>
               </a:ext>
             </a:extLst>
           </p:cNvPr>
@@ -10120,7 +10128,7 @@
           <p:cNvPr id="3" name="">
             <a:extLst xmlns:a="http://schemas.openxmlformats.org/drawingml/2006/main">
               <a:ext uri="{FF2B5EF4-FFF2-40B4-BE49-F238E27FC236}">
-                <a16:creationId xmlns:a16="http://schemas.microsoft.com/office/drawing/2014/main" id="{BBA5794A-B0DF-4BBB-B2AA-E7B50B170551}"/>
+                <a16:creationId xmlns:a16="http://schemas.microsoft.com/office/drawing/2014/main" id="{01C0024E-2FE5-484D-A612-BCA6D48B6D5A}"/>
               </a:ext>
             </a:extLst>
           </p:cNvPr>
@@ -10152,7 +10160,7 @@
           <p:cNvPr id="4" name="">
             <a:extLst xmlns:a="http://schemas.openxmlformats.org/drawingml/2006/main">
               <a:ext uri="{FF2B5EF4-FFF2-40B4-BE49-F238E27FC236}">
-                <a16:creationId xmlns:a16="http://schemas.microsoft.com/office/drawing/2014/main" id="{8908D7C3-F17E-485C-B938-CA0FDD613FB6}"/>
+                <a16:creationId xmlns:a16="http://schemas.microsoft.com/office/drawing/2014/main" id="{449BCD19-D094-4917-91B9-C23D568629DB}"/>
               </a:ext>
             </a:extLst>
           </p:cNvPr>
@@ -10209,7 +10217,7 @@
           <p:cNvPr id="5" name="">
             <a:extLst xmlns:a="http://schemas.openxmlformats.org/drawingml/2006/main">
               <a:ext uri="{FF2B5EF4-FFF2-40B4-BE49-F238E27FC236}">
-                <a16:creationId xmlns:a16="http://schemas.microsoft.com/office/drawing/2014/main" id="{2D93A962-BD99-48A4-B517-59380D5099D9}"/>
+                <a16:creationId xmlns:a16="http://schemas.microsoft.com/office/drawing/2014/main" id="{8E6BA385-6B24-4B93-BCE7-C60DDF3E7E01}"/>
               </a:ext>
             </a:extLst>
           </p:cNvPr>
@@ -10266,7 +10274,7 @@
           <p:cNvPr id="6" name="">
             <a:extLst xmlns:a="http://schemas.openxmlformats.org/drawingml/2006/main">
               <a:ext uri="{FF2B5EF4-FFF2-40B4-BE49-F238E27FC236}">
-                <a16:creationId xmlns:a16="http://schemas.microsoft.com/office/drawing/2014/main" id="{971222E9-49FD-4930-BA3E-00931B0C4440}"/>
+                <a16:creationId xmlns:a16="http://schemas.microsoft.com/office/drawing/2014/main" id="{7D235B57-D632-4FAC-9107-D43B3B16E7F4}"/>
               </a:ext>
             </a:extLst>
           </p:cNvPr>
@@ -10323,7 +10331,7 @@
           <p:cNvPr id="7" name="">
             <a:extLst xmlns:a="http://schemas.openxmlformats.org/drawingml/2006/main">
               <a:ext uri="{FF2B5EF4-FFF2-40B4-BE49-F238E27FC236}">
-                <a16:creationId xmlns:a16="http://schemas.microsoft.com/office/drawing/2014/main" id="{6DD050F6-179A-4256-947B-14E314805956}"/>
+                <a16:creationId xmlns:a16="http://schemas.microsoft.com/office/drawing/2014/main" id="{0F7D6D7D-A259-416B-AB26-26418689AF9C}"/>
               </a:ext>
             </a:extLst>
           </p:cNvPr>
@@ -10355,7 +10363,7 @@
           <p:cNvPr id="8" name="">
             <a:extLst xmlns:a="http://schemas.openxmlformats.org/drawingml/2006/main">
               <a:ext uri="{FF2B5EF4-FFF2-40B4-BE49-F238E27FC236}">
-                <a16:creationId xmlns:a16="http://schemas.microsoft.com/office/drawing/2014/main" id="{4FFFE214-C985-4151-8C39-78978948FA27}"/>
+                <a16:creationId xmlns:a16="http://schemas.microsoft.com/office/drawing/2014/main" id="{3E615E6F-529B-440A-BE57-1FDC08297703}"/>
               </a:ext>
             </a:extLst>
           </p:cNvPr>
@@ -10412,7 +10420,7 @@
           <p:cNvPr id="9" name="">
             <a:extLst xmlns:a="http://schemas.openxmlformats.org/drawingml/2006/main">
               <a:ext uri="{FF2B5EF4-FFF2-40B4-BE49-F238E27FC236}">
-                <a16:creationId xmlns:a16="http://schemas.microsoft.com/office/drawing/2014/main" id="{FC00926D-33BD-4082-9A5A-6E2490A78CF0}"/>
+                <a16:creationId xmlns:a16="http://schemas.microsoft.com/office/drawing/2014/main" id="{6B6923D5-42AE-4B5C-8832-A3B09BC4BAF0}"/>
               </a:ext>
             </a:extLst>
           </p:cNvPr>
@@ -10469,7 +10477,7 @@
           <p:cNvPr id="10" name="">
             <a:extLst xmlns:a="http://schemas.openxmlformats.org/drawingml/2006/main">
               <a:ext uri="{FF2B5EF4-FFF2-40B4-BE49-F238E27FC236}">
-                <a16:creationId xmlns:a16="http://schemas.microsoft.com/office/drawing/2014/main" id="{912D38E1-9CFC-4B89-866F-86C9974EC2AC}"/>
+                <a16:creationId xmlns:a16="http://schemas.microsoft.com/office/drawing/2014/main" id="{04629ED3-2907-4939-A674-907D8FF2966D}"/>
               </a:ext>
             </a:extLst>
           </p:cNvPr>
@@ -10526,7 +10534,7 @@
           <p:cNvPr id="11" name="">
             <a:extLst xmlns:a="http://schemas.openxmlformats.org/drawingml/2006/main">
               <a:ext uri="{FF2B5EF4-FFF2-40B4-BE49-F238E27FC236}">
-                <a16:creationId xmlns:a16="http://schemas.microsoft.com/office/drawing/2014/main" id="{83AE92A5-EF9B-4404-9602-ACD16F87152D}"/>
+                <a16:creationId xmlns:a16="http://schemas.microsoft.com/office/drawing/2014/main" id="{8CE96DBB-F0AF-48FE-B067-767289077B57}"/>
               </a:ext>
             </a:extLst>
           </p:cNvPr>
@@ -10583,7 +10591,7 @@
           <p:cNvPr id="12" name="">
             <a:extLst xmlns:a="http://schemas.openxmlformats.org/drawingml/2006/main">
               <a:ext uri="{FF2B5EF4-FFF2-40B4-BE49-F238E27FC236}">
-                <a16:creationId xmlns:a16="http://schemas.microsoft.com/office/drawing/2014/main" id="{BB619B02-9799-4982-9196-E1C4EC86AB8F}"/>
+                <a16:creationId xmlns:a16="http://schemas.microsoft.com/office/drawing/2014/main" id="{C918EE38-C25A-4E28-A1A6-01F17A60CD67}"/>
               </a:ext>
             </a:extLst>
           </p:cNvPr>
@@ -10640,7 +10648,7 @@
           <p:cNvPr id="13" name="">
             <a:extLst xmlns:a="http://schemas.openxmlformats.org/drawingml/2006/main">
               <a:ext uri="{FF2B5EF4-FFF2-40B4-BE49-F238E27FC236}">
-                <a16:creationId xmlns:a16="http://schemas.microsoft.com/office/drawing/2014/main" id="{4A6A6660-183F-4BD8-9BEB-A2D465B97A1B}"/>
+                <a16:creationId xmlns:a16="http://schemas.microsoft.com/office/drawing/2014/main" id="{F03CD5BC-6D8A-4D91-B23F-E25FEA227A5E}"/>
               </a:ext>
             </a:extLst>
           </p:cNvPr>
@@ -10697,7 +10705,7 @@
           <p:cNvPr id="14" name="">
             <a:extLst xmlns:a="http://schemas.openxmlformats.org/drawingml/2006/main">
               <a:ext uri="{FF2B5EF4-FFF2-40B4-BE49-F238E27FC236}">
-                <a16:creationId xmlns:a16="http://schemas.microsoft.com/office/drawing/2014/main" id="{8E0C5C11-2D0F-4AB9-A60E-199D07A26BA0}"/>
+                <a16:creationId xmlns:a16="http://schemas.microsoft.com/office/drawing/2014/main" id="{60972CF8-747A-452C-B3E7-5C6F2B41E9EB}"/>
               </a:ext>
             </a:extLst>
           </p:cNvPr>
@@ -10754,7 +10762,7 @@
           <p:cNvPr id="15" name="">
             <a:extLst xmlns:a="http://schemas.openxmlformats.org/drawingml/2006/main">
               <a:ext uri="{FF2B5EF4-FFF2-40B4-BE49-F238E27FC236}">
-                <a16:creationId xmlns:a16="http://schemas.microsoft.com/office/drawing/2014/main" id="{F326415B-7D4D-404D-ACC3-9D5BD5CF8D73}"/>
+                <a16:creationId xmlns:a16="http://schemas.microsoft.com/office/drawing/2014/main" id="{50DFBF12-C325-4310-9540-A69586204514}"/>
               </a:ext>
             </a:extLst>
           </p:cNvPr>
@@ -10809,7 +10817,7 @@
     </p:spTree>
     <p:extLst>
       <p:ext uri="{BB962C8B-B14F-4D97-AF65-F5344CB8AC3E}">
-        <p14:creationId xmlns:p14="http://schemas.microsoft.com/office/powerpoint/2010/main" val="702292280"/>
+        <p14:creationId xmlns:p14="http://schemas.microsoft.com/office/powerpoint/2010/main" val="1601562386"/>
       </p:ext>
     </p:extLst>
   </p:cSld>
@@ -10964,7 +10972,7 @@
           <p:cNvPr id="16" name="">
             <a:extLst xmlns:a="http://schemas.openxmlformats.org/drawingml/2006/main">
               <a:ext uri="{FF2B5EF4-FFF2-40B4-BE49-F238E27FC236}">
-                <a16:creationId xmlns:a16="http://schemas.microsoft.com/office/drawing/2014/main" id="{B1047B5F-C3C7-47CF-8607-F0A3B5D7B023}"/>
+                <a16:creationId xmlns:a16="http://schemas.microsoft.com/office/drawing/2014/main" id="{E1BEE178-6A7B-4178-A589-903E1326D444}"/>
               </a:ext>
             </a:extLst>
           </p:cNvPr>
@@ -10996,7 +11004,7 @@
           <p:cNvPr id="2" name="">
             <a:extLst xmlns:a="http://schemas.openxmlformats.org/drawingml/2006/main">
               <a:ext uri="{FF2B5EF4-FFF2-40B4-BE49-F238E27FC236}">
-                <a16:creationId xmlns:a16="http://schemas.microsoft.com/office/drawing/2014/main" id="{5CB45ACC-0CDB-4F5D-87C8-CD280D217394}"/>
+                <a16:creationId xmlns:a16="http://schemas.microsoft.com/office/drawing/2014/main" id="{09C746B4-F40B-44DF-801F-87841B1D29A7}"/>
               </a:ext>
             </a:extLst>
           </p:cNvPr>
@@ -11053,7 +11061,7 @@
           <p:cNvPr id="3" name="">
             <a:extLst xmlns:a="http://schemas.openxmlformats.org/drawingml/2006/main">
               <a:ext uri="{FF2B5EF4-FFF2-40B4-BE49-F238E27FC236}">
-                <a16:creationId xmlns:a16="http://schemas.microsoft.com/office/drawing/2014/main" id="{B65543C6-716B-48F4-B810-16083383107D}"/>
+                <a16:creationId xmlns:a16="http://schemas.microsoft.com/office/drawing/2014/main" id="{7B1AD9C1-2C45-46B8-897F-7780B63E7880}"/>
               </a:ext>
             </a:extLst>
           </p:cNvPr>
@@ -11085,7 +11093,7 @@
           <p:cNvPr id="4" name="">
             <a:extLst xmlns:a="http://schemas.openxmlformats.org/drawingml/2006/main">
               <a:ext uri="{FF2B5EF4-FFF2-40B4-BE49-F238E27FC236}">
-                <a16:creationId xmlns:a16="http://schemas.microsoft.com/office/drawing/2014/main" id="{C64E7D64-02BB-4FB4-A841-1E77348FEEA6}"/>
+                <a16:creationId xmlns:a16="http://schemas.microsoft.com/office/drawing/2014/main" id="{1E28C3E4-3C6A-4A33-B9D2-1FBD3E03BE8E}"/>
               </a:ext>
             </a:extLst>
           </p:cNvPr>
@@ -11142,7 +11150,7 @@
           <p:cNvPr id="5" name="">
             <a:extLst xmlns:a="http://schemas.openxmlformats.org/drawingml/2006/main">
               <a:ext uri="{FF2B5EF4-FFF2-40B4-BE49-F238E27FC236}">
-                <a16:creationId xmlns:a16="http://schemas.microsoft.com/office/drawing/2014/main" id="{0F4079CE-5585-4DB2-819C-9D92334A1F9A}"/>
+                <a16:creationId xmlns:a16="http://schemas.microsoft.com/office/drawing/2014/main" id="{B22FC4C1-E0D0-4095-A4D9-741C1429A3FA}"/>
               </a:ext>
             </a:extLst>
           </p:cNvPr>
@@ -11199,7 +11207,7 @@
           <p:cNvPr id="6" name="">
             <a:extLst xmlns:a="http://schemas.openxmlformats.org/drawingml/2006/main">
               <a:ext uri="{FF2B5EF4-FFF2-40B4-BE49-F238E27FC236}">
-                <a16:creationId xmlns:a16="http://schemas.microsoft.com/office/drawing/2014/main" id="{8E82C23B-BAB7-45D8-BA2A-69DF1B6DEFC4}"/>
+                <a16:creationId xmlns:a16="http://schemas.microsoft.com/office/drawing/2014/main" id="{9E55CFE7-1149-4F3C-97C6-4A0DB41AD368}"/>
               </a:ext>
             </a:extLst>
           </p:cNvPr>
@@ -11256,7 +11264,7 @@
           <p:cNvPr id="7" name="">
             <a:extLst xmlns:a="http://schemas.openxmlformats.org/drawingml/2006/main">
               <a:ext uri="{FF2B5EF4-FFF2-40B4-BE49-F238E27FC236}">
-                <a16:creationId xmlns:a16="http://schemas.microsoft.com/office/drawing/2014/main" id="{3E853829-D3E8-4BD0-A1D3-8A68E55004A1}"/>
+                <a16:creationId xmlns:a16="http://schemas.microsoft.com/office/drawing/2014/main" id="{F9D76827-21C1-4859-8027-C5F10830B6D8}"/>
               </a:ext>
             </a:extLst>
           </p:cNvPr>
@@ -11288,7 +11296,7 @@
           <p:cNvPr id="8" name="">
             <a:extLst xmlns:a="http://schemas.openxmlformats.org/drawingml/2006/main">
               <a:ext uri="{FF2B5EF4-FFF2-40B4-BE49-F238E27FC236}">
-                <a16:creationId xmlns:a16="http://schemas.microsoft.com/office/drawing/2014/main" id="{8E3E8445-5955-4BC7-87AB-C964CC2564E2}"/>
+                <a16:creationId xmlns:a16="http://schemas.microsoft.com/office/drawing/2014/main" id="{1B12C173-2975-48E0-9B22-0CE74EC0E5BC}"/>
               </a:ext>
             </a:extLst>
           </p:cNvPr>
@@ -11345,7 +11353,7 @@
           <p:cNvPr id="9" name="">
             <a:extLst xmlns:a="http://schemas.openxmlformats.org/drawingml/2006/main">
               <a:ext uri="{FF2B5EF4-FFF2-40B4-BE49-F238E27FC236}">
-                <a16:creationId xmlns:a16="http://schemas.microsoft.com/office/drawing/2014/main" id="{AD1CCA65-793C-473D-971A-53D922B0BDD3}"/>
+                <a16:creationId xmlns:a16="http://schemas.microsoft.com/office/drawing/2014/main" id="{AE4ED0B8-E3E6-4B10-A4AF-DCEC3F14F5F7}"/>
               </a:ext>
             </a:extLst>
           </p:cNvPr>
@@ -11406,7 +11414,7 @@
           <p:nvPr/>
         </p:nvPicPr>
         <p:blipFill>
-          <a:blip xmlns:r="http://schemas.openxmlformats.org/officeDocument/2006/relationships" xmlns:a="http://schemas.openxmlformats.org/drawingml/2006/main" r:embed="Rc0acdb797a914cbe"/>
+          <a:blip xmlns:r="http://schemas.openxmlformats.org/officeDocument/2006/relationships" xmlns:a="http://schemas.openxmlformats.org/drawingml/2006/main" r:embed="R4bcfc81cd2c44c9f"/>
           <a:stretch xmlns:a="http://schemas.openxmlformats.org/drawingml/2006/main"/>
         </p:blipFill>
         <p:spPr>
@@ -11424,7 +11432,7 @@
           <p:cNvPr id="11" name="">
             <a:extLst xmlns:a="http://schemas.openxmlformats.org/drawingml/2006/main">
               <a:ext uri="{FF2B5EF4-FFF2-40B4-BE49-F238E27FC236}">
-                <a16:creationId xmlns:a16="http://schemas.microsoft.com/office/drawing/2014/main" id="{603DF033-22E8-4631-A9B4-839E1D07FFB6}"/>
+                <a16:creationId xmlns:a16="http://schemas.microsoft.com/office/drawing/2014/main" id="{D29D2BC6-FE1F-46D0-9A85-98828A080A19}"/>
               </a:ext>
             </a:extLst>
           </p:cNvPr>
@@ -11481,7 +11489,7 @@
           <p:cNvPr id="12" name="">
             <a:extLst xmlns:a="http://schemas.openxmlformats.org/drawingml/2006/main">
               <a:ext uri="{FF2B5EF4-FFF2-40B4-BE49-F238E27FC236}">
-                <a16:creationId xmlns:a16="http://schemas.microsoft.com/office/drawing/2014/main" id="{94BDB901-4998-4306-8411-5E12E98D855D}"/>
+                <a16:creationId xmlns:a16="http://schemas.microsoft.com/office/drawing/2014/main" id="{3082F56A-B780-48B0-BF85-803EBE5340CE}"/>
               </a:ext>
             </a:extLst>
           </p:cNvPr>
@@ -11538,7 +11546,7 @@
           <p:cNvPr id="13" name="">
             <a:extLst xmlns:a="http://schemas.openxmlformats.org/drawingml/2006/main">
               <a:ext uri="{FF2B5EF4-FFF2-40B4-BE49-F238E27FC236}">
-                <a16:creationId xmlns:a16="http://schemas.microsoft.com/office/drawing/2014/main" id="{CBF4F9E4-1925-4A22-91FB-BEF8BAD20A15}"/>
+                <a16:creationId xmlns:a16="http://schemas.microsoft.com/office/drawing/2014/main" id="{36B4A3D4-9B31-4A13-834B-47BD64C32D11}"/>
               </a:ext>
             </a:extLst>
           </p:cNvPr>
@@ -11570,7 +11578,7 @@
           <p:cNvPr id="14" name="">
             <a:extLst xmlns:a="http://schemas.openxmlformats.org/drawingml/2006/main">
               <a:ext uri="{FF2B5EF4-FFF2-40B4-BE49-F238E27FC236}">
-                <a16:creationId xmlns:a16="http://schemas.microsoft.com/office/drawing/2014/main" id="{48028E5C-63F9-40F3-B395-CEDAE347CB92}"/>
+                <a16:creationId xmlns:a16="http://schemas.microsoft.com/office/drawing/2014/main" id="{D3C397FE-B2C6-487C-A3A2-ED86EEF17A64}"/>
               </a:ext>
             </a:extLst>
           </p:cNvPr>
@@ -11627,7 +11635,7 @@
           <p:cNvPr id="15" name="">
             <a:extLst xmlns:a="http://schemas.openxmlformats.org/drawingml/2006/main">
               <a:ext uri="{FF2B5EF4-FFF2-40B4-BE49-F238E27FC236}">
-                <a16:creationId xmlns:a16="http://schemas.microsoft.com/office/drawing/2014/main" id="{803C6E09-B808-4147-AB6D-37C3183E4B4E}"/>
+                <a16:creationId xmlns:a16="http://schemas.microsoft.com/office/drawing/2014/main" id="{E6D2AA54-7B8C-4E9F-AC02-8874E0ECCAE1}"/>
               </a:ext>
             </a:extLst>
           </p:cNvPr>
@@ -11682,7 +11690,7 @@
     </p:spTree>
     <p:extLst>
       <p:ext uri="{BB962C8B-B14F-4D97-AF65-F5344CB8AC3E}">
-        <p14:creationId xmlns:p14="http://schemas.microsoft.com/office/powerpoint/2010/main" val="1785669142"/>
+        <p14:creationId xmlns:p14="http://schemas.microsoft.com/office/powerpoint/2010/main" val="740312412"/>
       </p:ext>
     </p:extLst>
   </p:cSld>
@@ -11837,7 +11845,7 @@
           <p:cNvPr id="23" name="">
             <a:extLst xmlns:a="http://schemas.openxmlformats.org/drawingml/2006/main">
               <a:ext uri="{FF2B5EF4-FFF2-40B4-BE49-F238E27FC236}">
-                <a16:creationId xmlns:a16="http://schemas.microsoft.com/office/drawing/2014/main" id="{CC347C00-4A64-4EB2-A85C-F524C124E672}"/>
+                <a16:creationId xmlns:a16="http://schemas.microsoft.com/office/drawing/2014/main" id="{CEA3F603-0D3D-49FA-B733-6EF839D4960C}"/>
               </a:ext>
             </a:extLst>
           </p:cNvPr>
@@ -11869,7 +11877,7 @@
           <p:cNvPr id="2" name="">
             <a:extLst xmlns:a="http://schemas.openxmlformats.org/drawingml/2006/main">
               <a:ext uri="{FF2B5EF4-FFF2-40B4-BE49-F238E27FC236}">
-                <a16:creationId xmlns:a16="http://schemas.microsoft.com/office/drawing/2014/main" id="{A671A52F-9FB8-43E5-9C0F-A973269AF18A}"/>
+                <a16:creationId xmlns:a16="http://schemas.microsoft.com/office/drawing/2014/main" id="{160B21AC-0763-4512-8E44-29D25F637003}"/>
               </a:ext>
             </a:extLst>
           </p:cNvPr>
@@ -11926,7 +11934,7 @@
           <p:cNvPr id="3" name="">
             <a:extLst xmlns:a="http://schemas.openxmlformats.org/drawingml/2006/main">
               <a:ext uri="{FF2B5EF4-FFF2-40B4-BE49-F238E27FC236}">
-                <a16:creationId xmlns:a16="http://schemas.microsoft.com/office/drawing/2014/main" id="{79123724-A806-4C1B-BD30-E3A5644D24AE}"/>
+                <a16:creationId xmlns:a16="http://schemas.microsoft.com/office/drawing/2014/main" id="{8129A966-753F-48A0-B542-698F87908FF4}"/>
               </a:ext>
             </a:extLst>
           </p:cNvPr>
@@ -11958,7 +11966,7 @@
           <p:cNvPr id="4" name="">
             <a:extLst xmlns:a="http://schemas.openxmlformats.org/drawingml/2006/main">
               <a:ext uri="{FF2B5EF4-FFF2-40B4-BE49-F238E27FC236}">
-                <a16:creationId xmlns:a16="http://schemas.microsoft.com/office/drawing/2014/main" id="{A067F87D-F298-4529-9E15-30490291AA0C}"/>
+                <a16:creationId xmlns:a16="http://schemas.microsoft.com/office/drawing/2014/main" id="{764D3C86-1BC7-4E25-90D5-58E95DFEE147}"/>
               </a:ext>
             </a:extLst>
           </p:cNvPr>
@@ -12015,7 +12023,7 @@
           <p:cNvPr id="5" name="">
             <a:extLst xmlns:a="http://schemas.openxmlformats.org/drawingml/2006/main">
               <a:ext uri="{FF2B5EF4-FFF2-40B4-BE49-F238E27FC236}">
-                <a16:creationId xmlns:a16="http://schemas.microsoft.com/office/drawing/2014/main" id="{A8A16EC6-594B-4E62-A2D1-FF16912D3DC5}"/>
+                <a16:creationId xmlns:a16="http://schemas.microsoft.com/office/drawing/2014/main" id="{C8A1AD8C-9350-488D-BCFB-6645E4CE7B3C}"/>
               </a:ext>
             </a:extLst>
           </p:cNvPr>
@@ -12072,7 +12080,7 @@
           <p:cNvPr id="6" name="">
             <a:extLst xmlns:a="http://schemas.openxmlformats.org/drawingml/2006/main">
               <a:ext uri="{FF2B5EF4-FFF2-40B4-BE49-F238E27FC236}">
-                <a16:creationId xmlns:a16="http://schemas.microsoft.com/office/drawing/2014/main" id="{4BB9D163-7A14-4FD0-8FAF-A8C6543CB1C3}"/>
+                <a16:creationId xmlns:a16="http://schemas.microsoft.com/office/drawing/2014/main" id="{D37D466B-3FB5-40D7-A416-09EC99EFD825}"/>
               </a:ext>
             </a:extLst>
           </p:cNvPr>
@@ -12129,7 +12137,7 @@
           <p:cNvPr id="7" name="">
             <a:extLst xmlns:a="http://schemas.openxmlformats.org/drawingml/2006/main">
               <a:ext uri="{FF2B5EF4-FFF2-40B4-BE49-F238E27FC236}">
-                <a16:creationId xmlns:a16="http://schemas.microsoft.com/office/drawing/2014/main" id="{E73B83A8-20D5-49B7-81A5-E11CFC7B024A}"/>
+                <a16:creationId xmlns:a16="http://schemas.microsoft.com/office/drawing/2014/main" id="{BD06B37F-AD32-4E6B-8E99-C2C6C7A89B28}"/>
               </a:ext>
             </a:extLst>
           </p:cNvPr>
@@ -12161,7 +12169,7 @@
           <p:cNvPr id="8" name="">
             <a:extLst xmlns:a="http://schemas.openxmlformats.org/drawingml/2006/main">
               <a:ext uri="{FF2B5EF4-FFF2-40B4-BE49-F238E27FC236}">
-                <a16:creationId xmlns:a16="http://schemas.microsoft.com/office/drawing/2014/main" id="{94B9C847-0EDF-4360-BF56-89EA6E7F6EB9}"/>
+                <a16:creationId xmlns:a16="http://schemas.microsoft.com/office/drawing/2014/main" id="{2505BBEA-BD02-4B93-AC73-51C9E9829678}"/>
               </a:ext>
             </a:extLst>
           </p:cNvPr>
@@ -12218,7 +12226,7 @@
           <p:cNvPr id="9" name="">
             <a:extLst xmlns:a="http://schemas.openxmlformats.org/drawingml/2006/main">
               <a:ext uri="{FF2B5EF4-FFF2-40B4-BE49-F238E27FC236}">
-                <a16:creationId xmlns:a16="http://schemas.microsoft.com/office/drawing/2014/main" id="{C70F7083-26CD-4202-8D2C-C3F82DF1CC17}"/>
+                <a16:creationId xmlns:a16="http://schemas.microsoft.com/office/drawing/2014/main" id="{F94935FA-6B65-4834-8916-A366AF340656}"/>
               </a:ext>
             </a:extLst>
           </p:cNvPr>
@@ -12275,7 +12283,7 @@
           <p:cNvPr id="10" name="">
             <a:extLst xmlns:a="http://schemas.openxmlformats.org/drawingml/2006/main">
               <a:ext uri="{FF2B5EF4-FFF2-40B4-BE49-F238E27FC236}">
-                <a16:creationId xmlns:a16="http://schemas.microsoft.com/office/drawing/2014/main" id="{641B6223-F81D-400C-97E4-4B1F908BDB86}"/>
+                <a16:creationId xmlns:a16="http://schemas.microsoft.com/office/drawing/2014/main" id="{BA5E0195-E103-44D8-BFB0-D598DB9F0F62}"/>
               </a:ext>
             </a:extLst>
           </p:cNvPr>
@@ -12309,7 +12317,7 @@
           <p:cNvPr id="11" name="">
             <a:extLst xmlns:a="http://schemas.openxmlformats.org/drawingml/2006/main">
               <a:ext uri="{FF2B5EF4-FFF2-40B4-BE49-F238E27FC236}">
-                <a16:creationId xmlns:a16="http://schemas.microsoft.com/office/drawing/2014/main" id="{1D95D9B8-47AD-4D02-9BAA-AF63670733EE}"/>
+                <a16:creationId xmlns:a16="http://schemas.microsoft.com/office/drawing/2014/main" id="{33AC6B09-A434-4716-982B-56C3425A905E}"/>
               </a:ext>
             </a:extLst>
           </p:cNvPr>
@@ -12341,7 +12349,7 @@
           <p:cNvPr id="12" name="">
             <a:extLst xmlns:a="http://schemas.openxmlformats.org/drawingml/2006/main">
               <a:ext uri="{FF2B5EF4-FFF2-40B4-BE49-F238E27FC236}">
-                <a16:creationId xmlns:a16="http://schemas.microsoft.com/office/drawing/2014/main" id="{D21229D0-7076-4E9C-85F0-C2A3999AEEB7}"/>
+                <a16:creationId xmlns:a16="http://schemas.microsoft.com/office/drawing/2014/main" id="{24657071-8CCF-4798-84FE-566A14988DD0}"/>
               </a:ext>
             </a:extLst>
           </p:cNvPr>
@@ -12398,7 +12406,7 @@
           <p:cNvPr id="13" name="">
             <a:extLst xmlns:a="http://schemas.openxmlformats.org/drawingml/2006/main">
               <a:ext uri="{FF2B5EF4-FFF2-40B4-BE49-F238E27FC236}">
-                <a16:creationId xmlns:a16="http://schemas.microsoft.com/office/drawing/2014/main" id="{CC0CB2A5-113C-402C-96F1-C9E8355C7E7B}"/>
+                <a16:creationId xmlns:a16="http://schemas.microsoft.com/office/drawing/2014/main" id="{61A116A0-2F88-43FC-AAED-0DFCBA0943DA}"/>
               </a:ext>
             </a:extLst>
           </p:cNvPr>
@@ -12455,7 +12463,7 @@
           <p:cNvPr id="14" name="">
             <a:extLst xmlns:a="http://schemas.openxmlformats.org/drawingml/2006/main">
               <a:ext uri="{FF2B5EF4-FFF2-40B4-BE49-F238E27FC236}">
-                <a16:creationId xmlns:a16="http://schemas.microsoft.com/office/drawing/2014/main" id="{A1498CE7-85A8-4428-8378-9E6EF0C49712}"/>
+                <a16:creationId xmlns:a16="http://schemas.microsoft.com/office/drawing/2014/main" id="{1DF4A66A-83DC-4626-9DD3-84C77C8C2CD8}"/>
               </a:ext>
             </a:extLst>
           </p:cNvPr>
@@ -12489,7 +12497,7 @@
           <p:cNvPr id="15" name="">
             <a:extLst xmlns:a="http://schemas.openxmlformats.org/drawingml/2006/main">
               <a:ext uri="{FF2B5EF4-FFF2-40B4-BE49-F238E27FC236}">
-                <a16:creationId xmlns:a16="http://schemas.microsoft.com/office/drawing/2014/main" id="{716841C0-5A8D-45D3-B3D0-72238BD6F7A5}"/>
+                <a16:creationId xmlns:a16="http://schemas.microsoft.com/office/drawing/2014/main" id="{D95DFCA3-305A-421B-BF63-92C10FF0F75F}"/>
               </a:ext>
             </a:extLst>
           </p:cNvPr>
@@ -12521,7 +12529,7 @@
           <p:cNvPr id="16" name="">
             <a:extLst xmlns:a="http://schemas.openxmlformats.org/drawingml/2006/main">
               <a:ext uri="{FF2B5EF4-FFF2-40B4-BE49-F238E27FC236}">
-                <a16:creationId xmlns:a16="http://schemas.microsoft.com/office/drawing/2014/main" id="{690EC621-82C7-4DF6-9D94-55AD7AE43B5B}"/>
+                <a16:creationId xmlns:a16="http://schemas.microsoft.com/office/drawing/2014/main" id="{7236B528-83AE-4633-AA54-CDD1356A2E1F}"/>
               </a:ext>
             </a:extLst>
           </p:cNvPr>
@@ -12578,7 +12586,7 @@
           <p:cNvPr id="17" name="">
             <a:extLst xmlns:a="http://schemas.openxmlformats.org/drawingml/2006/main">
               <a:ext uri="{FF2B5EF4-FFF2-40B4-BE49-F238E27FC236}">
-                <a16:creationId xmlns:a16="http://schemas.microsoft.com/office/drawing/2014/main" id="{DD23FE0B-2E9D-4C74-A3E5-A2B14E40ED06}"/>
+                <a16:creationId xmlns:a16="http://schemas.microsoft.com/office/drawing/2014/main" id="{946C02ED-AE1A-4269-B841-BC3D6EC692D0}"/>
               </a:ext>
             </a:extLst>
           </p:cNvPr>
@@ -12635,7 +12643,7 @@
           <p:cNvPr id="18" name="">
             <a:extLst xmlns:a="http://schemas.openxmlformats.org/drawingml/2006/main">
               <a:ext uri="{FF2B5EF4-FFF2-40B4-BE49-F238E27FC236}">
-                <a16:creationId xmlns:a16="http://schemas.microsoft.com/office/drawing/2014/main" id="{0DB82008-7423-42E4-B8C9-02039969C34F}"/>
+                <a16:creationId xmlns:a16="http://schemas.microsoft.com/office/drawing/2014/main" id="{24231456-E8EB-4A36-9A86-4FBA0E449B1D}"/>
               </a:ext>
             </a:extLst>
           </p:cNvPr>
@@ -12669,7 +12677,7 @@
           <p:cNvPr id="19" name="">
             <a:extLst xmlns:a="http://schemas.openxmlformats.org/drawingml/2006/main">
               <a:ext uri="{FF2B5EF4-FFF2-40B4-BE49-F238E27FC236}">
-                <a16:creationId xmlns:a16="http://schemas.microsoft.com/office/drawing/2014/main" id="{83809FE0-778B-4EC0-8BE6-4A09204A11E4}"/>
+                <a16:creationId xmlns:a16="http://schemas.microsoft.com/office/drawing/2014/main" id="{A6586C93-7C5F-45F7-8967-C68139A67749}"/>
               </a:ext>
             </a:extLst>
           </p:cNvPr>
@@ -12701,7 +12709,7 @@
           <p:cNvPr id="20" name="">
             <a:extLst xmlns:a="http://schemas.openxmlformats.org/drawingml/2006/main">
               <a:ext uri="{FF2B5EF4-FFF2-40B4-BE49-F238E27FC236}">
-                <a16:creationId xmlns:a16="http://schemas.microsoft.com/office/drawing/2014/main" id="{BD7CCCF9-7832-4C85-8D5E-3E97447F74F7}"/>
+                <a16:creationId xmlns:a16="http://schemas.microsoft.com/office/drawing/2014/main" id="{5794F841-021A-4E90-B62D-085745E01ED1}"/>
               </a:ext>
             </a:extLst>
           </p:cNvPr>
@@ -12758,7 +12766,7 @@
           <p:cNvPr id="21" name="">
             <a:extLst xmlns:a="http://schemas.openxmlformats.org/drawingml/2006/main">
               <a:ext uri="{FF2B5EF4-FFF2-40B4-BE49-F238E27FC236}">
-                <a16:creationId xmlns:a16="http://schemas.microsoft.com/office/drawing/2014/main" id="{1714E823-66C1-4F53-B4CB-4CF3B69DCC90}"/>
+                <a16:creationId xmlns:a16="http://schemas.microsoft.com/office/drawing/2014/main" id="{1DAEF560-C4E2-49B1-859A-DA1AE2AAC4A1}"/>
               </a:ext>
             </a:extLst>
           </p:cNvPr>
@@ -12815,7 +12823,7 @@
           <p:cNvPr id="22" name="">
             <a:extLst xmlns:a="http://schemas.openxmlformats.org/drawingml/2006/main">
               <a:ext uri="{FF2B5EF4-FFF2-40B4-BE49-F238E27FC236}">
-                <a16:creationId xmlns:a16="http://schemas.microsoft.com/office/drawing/2014/main" id="{97F5E0A9-9B12-4F58-8FA0-269F56A0CC8D}"/>
+                <a16:creationId xmlns:a16="http://schemas.microsoft.com/office/drawing/2014/main" id="{DFD9BEED-1854-4912-B47C-E0B5BD7E7F78}"/>
               </a:ext>
             </a:extLst>
           </p:cNvPr>
@@ -12870,7 +12878,7 @@
     </p:spTree>
     <p:extLst>
       <p:ext uri="{BB962C8B-B14F-4D97-AF65-F5344CB8AC3E}">
-        <p14:creationId xmlns:p14="http://schemas.microsoft.com/office/powerpoint/2010/main" val="77681038"/>
+        <p14:creationId xmlns:p14="http://schemas.microsoft.com/office/powerpoint/2010/main" val="1294735484"/>
       </p:ext>
     </p:extLst>
   </p:cSld>
@@ -13071,7 +13079,7 @@
           <p:cNvPr id="22" name="">
             <a:extLst xmlns:a="http://schemas.openxmlformats.org/drawingml/2006/main">
               <a:ext uri="{FF2B5EF4-FFF2-40B4-BE49-F238E27FC236}">
-                <a16:creationId xmlns:a16="http://schemas.microsoft.com/office/drawing/2014/main" id="{2717CDB4-E930-46ED-8417-4546AB964FDB}"/>
+                <a16:creationId xmlns:a16="http://schemas.microsoft.com/office/drawing/2014/main" id="{909A7307-33BB-47BD-AE80-01A7FF7D59CE}"/>
               </a:ext>
             </a:extLst>
           </p:cNvPr>
@@ -13103,7 +13111,7 @@
           <p:cNvPr id="2" name="">
             <a:extLst xmlns:a="http://schemas.openxmlformats.org/drawingml/2006/main">
               <a:ext uri="{FF2B5EF4-FFF2-40B4-BE49-F238E27FC236}">
-                <a16:creationId xmlns:a16="http://schemas.microsoft.com/office/drawing/2014/main" id="{DDB05F27-CA82-42F4-BE89-8B7A53963297}"/>
+                <a16:creationId xmlns:a16="http://schemas.microsoft.com/office/drawing/2014/main" id="{AF6DC72D-3497-4AC2-8DD4-F7ED9F37D81D}"/>
               </a:ext>
             </a:extLst>
           </p:cNvPr>
@@ -13160,7 +13168,7 @@
           <p:cNvPr id="3" name="">
             <a:extLst xmlns:a="http://schemas.openxmlformats.org/drawingml/2006/main">
               <a:ext uri="{FF2B5EF4-FFF2-40B4-BE49-F238E27FC236}">
-                <a16:creationId xmlns:a16="http://schemas.microsoft.com/office/drawing/2014/main" id="{600F7E6D-69BA-4D78-B39E-CAC78DDF24FD}"/>
+                <a16:creationId xmlns:a16="http://schemas.microsoft.com/office/drawing/2014/main" id="{7A2F333D-2B18-4125-9253-1C47DD985E81}"/>
               </a:ext>
             </a:extLst>
           </p:cNvPr>
@@ -13192,7 +13200,7 @@
           <p:cNvPr id="4" name="">
             <a:extLst xmlns:a="http://schemas.openxmlformats.org/drawingml/2006/main">
               <a:ext uri="{FF2B5EF4-FFF2-40B4-BE49-F238E27FC236}">
-                <a16:creationId xmlns:a16="http://schemas.microsoft.com/office/drawing/2014/main" id="{43591EFB-1DBA-4C96-A41F-EF355434B064}"/>
+                <a16:creationId xmlns:a16="http://schemas.microsoft.com/office/drawing/2014/main" id="{A8F08039-DDF6-472E-89D5-41184C4BBA88}"/>
               </a:ext>
             </a:extLst>
           </p:cNvPr>
@@ -13249,7 +13257,7 @@
           <p:cNvPr id="5" name="">
             <a:extLst xmlns:a="http://schemas.openxmlformats.org/drawingml/2006/main">
               <a:ext uri="{FF2B5EF4-FFF2-40B4-BE49-F238E27FC236}">
-                <a16:creationId xmlns:a16="http://schemas.microsoft.com/office/drawing/2014/main" id="{2AEF69F2-869F-439C-B7F4-3EA03AACF9EB}"/>
+                <a16:creationId xmlns:a16="http://schemas.microsoft.com/office/drawing/2014/main" id="{C7181CCA-346E-47F8-9772-FEDB13443F44}"/>
               </a:ext>
             </a:extLst>
           </p:cNvPr>
@@ -13306,7 +13314,7 @@
           <p:cNvPr id="6" name="">
             <a:extLst xmlns:a="http://schemas.openxmlformats.org/drawingml/2006/main">
               <a:ext uri="{FF2B5EF4-FFF2-40B4-BE49-F238E27FC236}">
-                <a16:creationId xmlns:a16="http://schemas.microsoft.com/office/drawing/2014/main" id="{AC495592-82DA-4ACF-994A-AB06B939E057}"/>
+                <a16:creationId xmlns:a16="http://schemas.microsoft.com/office/drawing/2014/main" id="{D3B6FA5E-D75F-4ACA-AD03-CC93FC766646}"/>
               </a:ext>
             </a:extLst>
           </p:cNvPr>
@@ -13363,7 +13371,7 @@
           <p:cNvPr id="7" name="">
             <a:extLst xmlns:a="http://schemas.openxmlformats.org/drawingml/2006/main">
               <a:ext uri="{FF2B5EF4-FFF2-40B4-BE49-F238E27FC236}">
-                <a16:creationId xmlns:a16="http://schemas.microsoft.com/office/drawing/2014/main" id="{C7BB8A81-F10E-4879-83BB-225A1BAA5D9C}"/>
+                <a16:creationId xmlns:a16="http://schemas.microsoft.com/office/drawing/2014/main" id="{DE88D6CB-CC8A-484D-9A76-37F553C2558F}"/>
               </a:ext>
             </a:extLst>
           </p:cNvPr>
@@ -13395,7 +13403,7 @@
           <p:cNvPr id="8" name="">
             <a:extLst xmlns:a="http://schemas.openxmlformats.org/drawingml/2006/main">
               <a:ext uri="{FF2B5EF4-FFF2-40B4-BE49-F238E27FC236}">
-                <a16:creationId xmlns:a16="http://schemas.microsoft.com/office/drawing/2014/main" id="{BC760647-F8E6-4DD9-9714-68BA02B2F602}"/>
+                <a16:creationId xmlns:a16="http://schemas.microsoft.com/office/drawing/2014/main" id="{F9FE373E-C2C2-4757-B8A3-6476B4594D17}"/>
               </a:ext>
             </a:extLst>
           </p:cNvPr>
@@ -13452,7 +13460,7 @@
           <p:cNvPr id="9" name="">
             <a:extLst xmlns:a="http://schemas.openxmlformats.org/drawingml/2006/main">
               <a:ext uri="{FF2B5EF4-FFF2-40B4-BE49-F238E27FC236}">
-                <a16:creationId xmlns:a16="http://schemas.microsoft.com/office/drawing/2014/main" id="{71ED1A75-9ED3-4092-84E1-CEEB1909F0A5}"/>
+                <a16:creationId xmlns:a16="http://schemas.microsoft.com/office/drawing/2014/main" id="{9AC404BA-68FC-415C-B59C-76BA2216ED22}"/>
               </a:ext>
             </a:extLst>
           </p:cNvPr>
@@ -13509,7 +13517,7 @@
           <p:cNvPr id="10" name="">
             <a:extLst xmlns:a="http://schemas.openxmlformats.org/drawingml/2006/main">
               <a:ext uri="{FF2B5EF4-FFF2-40B4-BE49-F238E27FC236}">
-                <a16:creationId xmlns:a16="http://schemas.microsoft.com/office/drawing/2014/main" id="{130B61C5-6BED-4FAA-954F-9FA513CE7608}"/>
+                <a16:creationId xmlns:a16="http://schemas.microsoft.com/office/drawing/2014/main" id="{F1CDF2EA-7AEB-46A5-91B3-9766D1E6FC75}"/>
               </a:ext>
             </a:extLst>
           </p:cNvPr>
@@ -13543,7 +13551,7 @@
           <p:cNvPr id="11" name="">
             <a:extLst xmlns:a="http://schemas.openxmlformats.org/drawingml/2006/main">
               <a:ext uri="{FF2B5EF4-FFF2-40B4-BE49-F238E27FC236}">
-                <a16:creationId xmlns:a16="http://schemas.microsoft.com/office/drawing/2014/main" id="{3F2E3514-B4A0-4718-A00D-C1BB10E55213}"/>
+                <a16:creationId xmlns:a16="http://schemas.microsoft.com/office/drawing/2014/main" id="{BFF8F79B-53BE-4315-94DE-5682EB2DC78F}"/>
               </a:ext>
             </a:extLst>
           </p:cNvPr>
@@ -13575,7 +13583,7 @@
           <p:cNvPr id="12" name="">
             <a:extLst xmlns:a="http://schemas.openxmlformats.org/drawingml/2006/main">
               <a:ext uri="{FF2B5EF4-FFF2-40B4-BE49-F238E27FC236}">
-                <a16:creationId xmlns:a16="http://schemas.microsoft.com/office/drawing/2014/main" id="{A30FECC9-3843-4209-B697-22ACC7DFAFF8}"/>
+                <a16:creationId xmlns:a16="http://schemas.microsoft.com/office/drawing/2014/main" id="{FCC7F676-38EA-4CA9-B4BF-1B09165A37A0}"/>
               </a:ext>
             </a:extLst>
           </p:cNvPr>
@@ -13632,7 +13640,7 @@
           <p:cNvPr id="13" name="">
             <a:extLst xmlns:a="http://schemas.openxmlformats.org/drawingml/2006/main">
               <a:ext uri="{FF2B5EF4-FFF2-40B4-BE49-F238E27FC236}">
-                <a16:creationId xmlns:a16="http://schemas.microsoft.com/office/drawing/2014/main" id="{59C14CEB-D989-439E-9F0D-B29172F8FCCB}"/>
+                <a16:creationId xmlns:a16="http://schemas.microsoft.com/office/drawing/2014/main" id="{A20D1620-D3F8-42E7-8443-323985131CE5}"/>
               </a:ext>
             </a:extLst>
           </p:cNvPr>
@@ -13689,7 +13697,7 @@
           <p:cNvPr id="14" name="">
             <a:extLst xmlns:a="http://schemas.openxmlformats.org/drawingml/2006/main">
               <a:ext uri="{FF2B5EF4-FFF2-40B4-BE49-F238E27FC236}">
-                <a16:creationId xmlns:a16="http://schemas.microsoft.com/office/drawing/2014/main" id="{1556F119-D6CC-47EE-9C35-56AEC1EBF5AF}"/>
+                <a16:creationId xmlns:a16="http://schemas.microsoft.com/office/drawing/2014/main" id="{808DC5E9-6A98-4635-A990-8959F765B48F}"/>
               </a:ext>
             </a:extLst>
           </p:cNvPr>
@@ -13723,7 +13731,7 @@
           <p:cNvPr id="15" name="">
             <a:extLst xmlns:a="http://schemas.openxmlformats.org/drawingml/2006/main">
               <a:ext uri="{FF2B5EF4-FFF2-40B4-BE49-F238E27FC236}">
-                <a16:creationId xmlns:a16="http://schemas.microsoft.com/office/drawing/2014/main" id="{3D0EA174-2E2F-4E90-BC98-BA53F8F81F36}"/>
+                <a16:creationId xmlns:a16="http://schemas.microsoft.com/office/drawing/2014/main" id="{83EBF5B3-5CBC-483B-8C04-F16EC509F33B}"/>
               </a:ext>
             </a:extLst>
           </p:cNvPr>
@@ -13755,7 +13763,7 @@
           <p:cNvPr id="16" name="">
             <a:extLst xmlns:a="http://schemas.openxmlformats.org/drawingml/2006/main">
               <a:ext uri="{FF2B5EF4-FFF2-40B4-BE49-F238E27FC236}">
-                <a16:creationId xmlns:a16="http://schemas.microsoft.com/office/drawing/2014/main" id="{078F04E8-D7CD-4E34-8B58-75063182627F}"/>
+                <a16:creationId xmlns:a16="http://schemas.microsoft.com/office/drawing/2014/main" id="{7389CDFA-3B3E-4EF6-A086-3F8D958B747D}"/>
               </a:ext>
             </a:extLst>
           </p:cNvPr>
@@ -13812,7 +13820,7 @@
           <p:cNvPr id="17" name="">
             <a:extLst xmlns:a="http://schemas.openxmlformats.org/drawingml/2006/main">
               <a:ext uri="{FF2B5EF4-FFF2-40B4-BE49-F238E27FC236}">
-                <a16:creationId xmlns:a16="http://schemas.microsoft.com/office/drawing/2014/main" id="{75CC7A67-4A7A-4A39-B16B-60B8C06E059C}"/>
+                <a16:creationId xmlns:a16="http://schemas.microsoft.com/office/drawing/2014/main" id="{B3A36D23-46D1-4C56-B722-F73D0E8FCBBD}"/>
               </a:ext>
             </a:extLst>
           </p:cNvPr>
@@ -13869,7 +13877,7 @@
           <p:cNvPr id="18" name="">
             <a:extLst xmlns:a="http://schemas.openxmlformats.org/drawingml/2006/main">
               <a:ext uri="{FF2B5EF4-FFF2-40B4-BE49-F238E27FC236}">
-                <a16:creationId xmlns:a16="http://schemas.microsoft.com/office/drawing/2014/main" id="{F7269E5B-8D14-4475-8F57-050A8A566ABF}"/>
+                <a16:creationId xmlns:a16="http://schemas.microsoft.com/office/drawing/2014/main" id="{D0FE76D0-85CC-47B4-8385-D990D064490A}"/>
               </a:ext>
             </a:extLst>
           </p:cNvPr>
@@ -13903,7 +13911,7 @@
           <p:cNvPr id="19" name="">
             <a:extLst xmlns:a="http://schemas.openxmlformats.org/drawingml/2006/main">
               <a:ext uri="{FF2B5EF4-FFF2-40B4-BE49-F238E27FC236}">
-                <a16:creationId xmlns:a16="http://schemas.microsoft.com/office/drawing/2014/main" id="{ADEED434-8C39-4288-8E39-543F14C59508}"/>
+                <a16:creationId xmlns:a16="http://schemas.microsoft.com/office/drawing/2014/main" id="{5411648B-E57C-4230-AD89-1B23B83BB5CC}"/>
               </a:ext>
             </a:extLst>
           </p:cNvPr>
@@ -13935,7 +13943,7 @@
           <p:cNvPr id="20" name="">
             <a:extLst xmlns:a="http://schemas.openxmlformats.org/drawingml/2006/main">
               <a:ext uri="{FF2B5EF4-FFF2-40B4-BE49-F238E27FC236}">
-                <a16:creationId xmlns:a16="http://schemas.microsoft.com/office/drawing/2014/main" id="{3F665149-AE08-4E40-9F3C-B6BD0B5654D0}"/>
+                <a16:creationId xmlns:a16="http://schemas.microsoft.com/office/drawing/2014/main" id="{AC0F86DA-8068-421F-875B-AF24BB6224D5}"/>
               </a:ext>
             </a:extLst>
           </p:cNvPr>
@@ -13992,7 +14000,7 @@
           <p:cNvPr id="21" name="">
             <a:extLst xmlns:a="http://schemas.openxmlformats.org/drawingml/2006/main">
               <a:ext uri="{FF2B5EF4-FFF2-40B4-BE49-F238E27FC236}">
-                <a16:creationId xmlns:a16="http://schemas.microsoft.com/office/drawing/2014/main" id="{E83A4CA7-22AE-4260-8A13-4D280BABC70E}"/>
+                <a16:creationId xmlns:a16="http://schemas.microsoft.com/office/drawing/2014/main" id="{D7E08FF4-25E5-49B3-82BC-2DD606D998F3}"/>
               </a:ext>
             </a:extLst>
           </p:cNvPr>
@@ -14047,7 +14055,7 @@
     </p:spTree>
     <p:extLst>
       <p:ext uri="{BB962C8B-B14F-4D97-AF65-F5344CB8AC3E}">
-        <p14:creationId xmlns:p14="http://schemas.microsoft.com/office/powerpoint/2010/main" val="1992949807"/>
+        <p14:creationId xmlns:p14="http://schemas.microsoft.com/office/powerpoint/2010/main" val="550139779"/>
       </p:ext>
     </p:extLst>
   </p:cSld>
